--- a/pptx_sessions_8_22/第21回_基礎編_講師用.pptx
+++ b/pptx_sessions_8_22/第21回_基礎編_講師用.pptx
@@ -1531,7 +1531,9 @@
           </a:ln>
         </p:spPr>
         <p:txBody>
-          <a:bodyPr/>
+          <a:bodyPr wrap="square">
+            <a:normAutofit/>
+          </a:bodyPr>
           <a:p/>
         </p:txBody>
       </p:sp>
@@ -1560,7 +1562,9 @@
           </a:ln>
         </p:spPr>
         <p:txBody>
-          <a:bodyPr/>
+          <a:bodyPr wrap="square">
+            <a:normAutofit/>
+          </a:bodyPr>
           <a:p/>
         </p:txBody>
       </p:sp>
@@ -1582,7 +1586,9 @@
           <a:ln/>
         </p:spPr>
         <p:txBody>
-          <a:bodyPr wrap="square" rtlCol="0" anchor="ctr"/>
+          <a:bodyPr wrap="square" rtlCol="0" anchor="ctr">
+            <a:normAutofit/>
+          </a:bodyPr>
           <a:lstStyle/>
           <a:p>
             <a:pPr algn="ctr" indent="0" marL="0">
@@ -1621,7 +1627,9 @@
           <a:ln/>
         </p:spPr>
         <p:txBody>
-          <a:bodyPr wrap="square" rtlCol="0" anchor="ctr"/>
+          <a:bodyPr wrap="square" rtlCol="0" anchor="ctr">
+            <a:normAutofit/>
+          </a:bodyPr>
           <a:lstStyle/>
           <a:p>
             <a:pPr algn="ctr" indent="0" marL="0">
@@ -1660,7 +1668,9 @@
           <a:ln/>
         </p:spPr>
         <p:txBody>
-          <a:bodyPr wrap="square" rtlCol="0" anchor="ctr"/>
+          <a:bodyPr wrap="square" rtlCol="0" anchor="ctr">
+            <a:normAutofit/>
+          </a:bodyPr>
           <a:lstStyle/>
           <a:p>
             <a:pPr algn="ctr" indent="0" marL="0">
@@ -1699,7 +1709,9 @@
           <a:ln/>
         </p:spPr>
         <p:txBody>
-          <a:bodyPr wrap="square" rtlCol="0" anchor="ctr"/>
+          <a:bodyPr wrap="square" rtlCol="0" anchor="ctr">
+            <a:normAutofit/>
+          </a:bodyPr>
           <a:lstStyle/>
           <a:p>
             <a:pPr algn="ctr" indent="0" marL="0">
@@ -1747,7 +1759,9 @@
           </a:ln>
         </p:spPr>
         <p:txBody>
-          <a:bodyPr/>
+          <a:bodyPr wrap="square">
+            <a:normAutofit/>
+          </a:bodyPr>
           <a:p/>
         </p:txBody>
       </p:sp>
@@ -1769,7 +1783,9 @@
           <a:ln/>
         </p:spPr>
         <p:txBody>
-          <a:bodyPr wrap="square" rtlCol="0" anchor="ctr"/>
+          <a:bodyPr wrap="square" rtlCol="0" anchor="ctr">
+            <a:normAutofit/>
+          </a:bodyPr>
           <a:lstStyle/>
           <a:p>
             <a:pPr algn="ctr" indent="0" marL="0">
@@ -1840,7 +1856,9 @@
           </a:ln>
         </p:spPr>
         <p:txBody>
-          <a:bodyPr/>
+          <a:bodyPr wrap="square">
+            <a:normAutofit/>
+          </a:bodyPr>
           <a:p/>
         </p:txBody>
       </p:sp>
@@ -1869,7 +1887,9 @@
           </a:ln>
         </p:spPr>
         <p:txBody>
-          <a:bodyPr/>
+          <a:bodyPr wrap="square">
+            <a:normAutofit/>
+          </a:bodyPr>
           <a:p/>
         </p:txBody>
       </p:sp>
@@ -1891,7 +1911,9 @@
           <a:ln/>
         </p:spPr>
         <p:txBody>
-          <a:bodyPr wrap="square" rtlCol="0" anchor="ctr"/>
+          <a:bodyPr wrap="square" rtlCol="0" anchor="ctr">
+            <a:normAutofit/>
+          </a:bodyPr>
           <a:lstStyle/>
           <a:p>
             <a:pPr indent="0" marL="0">
@@ -1930,7 +1952,9 @@
           <a:ln/>
         </p:spPr>
         <p:txBody>
-          <a:bodyPr wrap="square" rtlCol="0" anchor="ctr"/>
+          <a:bodyPr wrap="square" rtlCol="0" anchor="ctr">
+            <a:normAutofit/>
+          </a:bodyPr>
           <a:lstStyle/>
           <a:p>
             <a:pPr indent="0" marL="0">
@@ -1978,7 +2002,9 @@
           </a:ln>
         </p:spPr>
         <p:txBody>
-          <a:bodyPr/>
+          <a:bodyPr wrap="square">
+            <a:normAutofit/>
+          </a:bodyPr>
           <a:p/>
         </p:txBody>
       </p:sp>
@@ -2000,7 +2026,9 @@
           <a:ln/>
         </p:spPr>
         <p:txBody>
-          <a:bodyPr wrap="square" rtlCol="0" anchor="ctr"/>
+          <a:bodyPr wrap="square" rtlCol="0" anchor="ctr">
+            <a:normAutofit/>
+          </a:bodyPr>
           <a:lstStyle/>
           <a:p>
             <a:pPr indent="0" marL="0">
@@ -2039,7 +2067,9 @@
           <a:ln/>
         </p:spPr>
         <p:txBody>
-          <a:bodyPr wrap="square" rtlCol="0" anchor="ctr"/>
+          <a:bodyPr wrap="square" rtlCol="0" anchor="ctr">
+            <a:normAutofit/>
+          </a:bodyPr>
           <a:lstStyle/>
           <a:p>
             <a:pPr indent="0" marL="0">
@@ -2078,7 +2108,9 @@
           <a:ln/>
         </p:spPr>
         <p:txBody>
-          <a:bodyPr wrap="square" rtlCol="0" anchor="ctr"/>
+          <a:bodyPr wrap="square" rtlCol="0" anchor="ctr">
+            <a:normAutofit/>
+          </a:bodyPr>
           <a:lstStyle/>
           <a:p>
             <a:pPr indent="0" marL="0">
@@ -2126,7 +2158,9 @@
           </a:ln>
         </p:spPr>
         <p:txBody>
-          <a:bodyPr/>
+          <a:bodyPr wrap="square">
+            <a:normAutofit/>
+          </a:bodyPr>
           <a:p/>
         </p:txBody>
       </p:sp>
@@ -2148,7 +2182,9 @@
           <a:ln/>
         </p:spPr>
         <p:txBody>
-          <a:bodyPr wrap="square" rtlCol="0" anchor="ctr"/>
+          <a:bodyPr wrap="square" rtlCol="0" anchor="ctr">
+            <a:normAutofit/>
+          </a:bodyPr>
           <a:lstStyle/>
           <a:p>
             <a:pPr indent="0" marL="0">
@@ -2187,7 +2223,9 @@
           <a:ln/>
         </p:spPr>
         <p:txBody>
-          <a:bodyPr wrap="square" rtlCol="0" anchor="ctr"/>
+          <a:bodyPr wrap="square" rtlCol="0" anchor="ctr">
+            <a:normAutofit/>
+          </a:bodyPr>
           <a:lstStyle/>
           <a:p>
             <a:pPr indent="0" marL="0">
@@ -2226,7 +2264,9 @@
           <a:ln/>
         </p:spPr>
         <p:txBody>
-          <a:bodyPr wrap="square" rtlCol="0" anchor="ctr"/>
+          <a:bodyPr wrap="square" rtlCol="0" anchor="ctr">
+            <a:normAutofit/>
+          </a:bodyPr>
           <a:lstStyle/>
           <a:p>
             <a:pPr indent="0" marL="0">
@@ -2274,7 +2314,9 @@
           </a:ln>
         </p:spPr>
         <p:txBody>
-          <a:bodyPr/>
+          <a:bodyPr wrap="square">
+            <a:normAutofit/>
+          </a:bodyPr>
           <a:p/>
         </p:txBody>
       </p:sp>
@@ -2296,7 +2338,9 @@
           <a:ln/>
         </p:spPr>
         <p:txBody>
-          <a:bodyPr wrap="square" rtlCol="0" anchor="ctr"/>
+          <a:bodyPr wrap="square" rtlCol="0" anchor="ctr">
+            <a:normAutofit/>
+          </a:bodyPr>
           <a:lstStyle/>
           <a:p>
             <a:pPr indent="0" marL="0">
@@ -2335,7 +2379,9 @@
           <a:ln/>
         </p:spPr>
         <p:txBody>
-          <a:bodyPr wrap="square" rtlCol="0" anchor="ctr"/>
+          <a:bodyPr wrap="square" rtlCol="0" anchor="ctr">
+            <a:normAutofit/>
+          </a:bodyPr>
           <a:lstStyle/>
           <a:p>
             <a:pPr indent="0" marL="0">
@@ -2374,7 +2420,9 @@
           <a:ln/>
         </p:spPr>
         <p:txBody>
-          <a:bodyPr wrap="square" rtlCol="0" anchor="ctr"/>
+          <a:bodyPr wrap="square" rtlCol="0" anchor="ctr">
+            <a:normAutofit/>
+          </a:bodyPr>
           <a:lstStyle/>
           <a:p>
             <a:pPr indent="0" marL="0">
@@ -2413,7 +2461,9 @@
           <a:ln/>
         </p:spPr>
         <p:txBody>
-          <a:bodyPr wrap="square" rtlCol="0" anchor="ctr"/>
+          <a:bodyPr wrap="square" rtlCol="0" anchor="ctr">
+            <a:normAutofit/>
+          </a:bodyPr>
           <a:lstStyle/>
           <a:p>
             <a:pPr algn="r" indent="0" marL="0">
@@ -2484,7 +2534,9 @@
           </a:ln>
         </p:spPr>
         <p:txBody>
-          <a:bodyPr/>
+          <a:bodyPr wrap="square">
+            <a:normAutofit/>
+          </a:bodyPr>
           <a:p/>
         </p:txBody>
       </p:sp>
@@ -2513,7 +2565,9 @@
           </a:ln>
         </p:spPr>
         <p:txBody>
-          <a:bodyPr/>
+          <a:bodyPr wrap="square">
+            <a:normAutofit/>
+          </a:bodyPr>
           <a:p/>
         </p:txBody>
       </p:sp>
@@ -2535,7 +2589,9 @@
           <a:ln/>
         </p:spPr>
         <p:txBody>
-          <a:bodyPr wrap="square" rtlCol="0" anchor="ctr"/>
+          <a:bodyPr wrap="square" rtlCol="0" anchor="ctr">
+            <a:normAutofit/>
+          </a:bodyPr>
           <a:lstStyle/>
           <a:p>
             <a:pPr indent="0" marL="0">
@@ -2574,7 +2630,9 @@
           <a:ln/>
         </p:spPr>
         <p:txBody>
-          <a:bodyPr wrap="square" rtlCol="0" anchor="ctr"/>
+          <a:bodyPr wrap="square" rtlCol="0" anchor="ctr">
+            <a:normAutofit/>
+          </a:bodyPr>
           <a:lstStyle/>
           <a:p>
             <a:pPr indent="0" marL="0">
@@ -2620,7 +2678,9 @@
           </a:ln>
         </p:spPr>
         <p:txBody>
-          <a:bodyPr/>
+          <a:bodyPr wrap="square">
+            <a:normAutofit/>
+          </a:bodyPr>
           <a:p/>
         </p:txBody>
       </p:sp>
@@ -2651,7 +2711,9 @@
           </a:ln>
         </p:spPr>
         <p:txBody>
-          <a:bodyPr/>
+          <a:bodyPr wrap="square">
+            <a:normAutofit/>
+          </a:bodyPr>
           <a:p/>
         </p:txBody>
       </p:sp>
@@ -2673,7 +2735,9 @@
           <a:ln/>
         </p:spPr>
         <p:txBody>
-          <a:bodyPr wrap="square" rtlCol="0" anchor="ctr"/>
+          <a:bodyPr wrap="square" rtlCol="0" anchor="ctr">
+            <a:normAutofit/>
+          </a:bodyPr>
           <a:lstStyle/>
           <a:p>
             <a:pPr algn="ctr" indent="0" marL="0">
@@ -2712,7 +2776,9 @@
           <a:ln/>
         </p:spPr>
         <p:txBody>
-          <a:bodyPr wrap="square" rtlCol="0" anchor="ctr"/>
+          <a:bodyPr wrap="square" rtlCol="0" anchor="ctr">
+            <a:normAutofit/>
+          </a:bodyPr>
           <a:lstStyle/>
           <a:p>
             <a:pPr indent="0" marL="0">
@@ -2758,7 +2824,9 @@
           </a:ln>
         </p:spPr>
         <p:txBody>
-          <a:bodyPr/>
+          <a:bodyPr wrap="square">
+            <a:normAutofit/>
+          </a:bodyPr>
           <a:p/>
         </p:txBody>
       </p:sp>
@@ -2789,7 +2857,9 @@
           </a:ln>
         </p:spPr>
         <p:txBody>
-          <a:bodyPr/>
+          <a:bodyPr wrap="square">
+            <a:normAutofit/>
+          </a:bodyPr>
           <a:p/>
         </p:txBody>
       </p:sp>
@@ -2811,7 +2881,9 @@
           <a:ln/>
         </p:spPr>
         <p:txBody>
-          <a:bodyPr wrap="square" rtlCol="0" anchor="ctr"/>
+          <a:bodyPr wrap="square" rtlCol="0" anchor="ctr">
+            <a:normAutofit/>
+          </a:bodyPr>
           <a:lstStyle/>
           <a:p>
             <a:pPr algn="ctr" indent="0" marL="0">
@@ -2850,7 +2922,9 @@
           <a:ln/>
         </p:spPr>
         <p:txBody>
-          <a:bodyPr wrap="square" rtlCol="0" anchor="ctr"/>
+          <a:bodyPr wrap="square" rtlCol="0" anchor="ctr">
+            <a:normAutofit/>
+          </a:bodyPr>
           <a:lstStyle/>
           <a:p>
             <a:pPr indent="0" marL="0">
@@ -2889,7 +2963,9 @@
           <a:ln/>
         </p:spPr>
         <p:txBody>
-          <a:bodyPr wrap="square" rtlCol="0" anchor="ctr"/>
+          <a:bodyPr wrap="square" rtlCol="0" anchor="ctr">
+            <a:normAutofit/>
+          </a:bodyPr>
           <a:lstStyle/>
           <a:p>
             <a:pPr indent="0" marL="0">
@@ -2937,7 +3013,9 @@
           </a:ln>
         </p:spPr>
         <p:txBody>
-          <a:bodyPr/>
+          <a:bodyPr wrap="square">
+            <a:normAutofit/>
+          </a:bodyPr>
           <a:p/>
         </p:txBody>
       </p:sp>
@@ -2968,7 +3046,9 @@
           </a:ln>
         </p:spPr>
         <p:txBody>
-          <a:bodyPr/>
+          <a:bodyPr wrap="square">
+            <a:normAutofit/>
+          </a:bodyPr>
           <a:p/>
         </p:txBody>
       </p:sp>
@@ -2990,7 +3070,9 @@
           <a:ln/>
         </p:spPr>
         <p:txBody>
-          <a:bodyPr wrap="square" rtlCol="0" anchor="ctr"/>
+          <a:bodyPr wrap="square" rtlCol="0" anchor="ctr">
+            <a:normAutofit/>
+          </a:bodyPr>
           <a:lstStyle/>
           <a:p>
             <a:pPr algn="ctr" indent="0" marL="0">
@@ -3029,7 +3111,9 @@
           <a:ln/>
         </p:spPr>
         <p:txBody>
-          <a:bodyPr wrap="square" rtlCol="0" anchor="ctr"/>
+          <a:bodyPr wrap="square" rtlCol="0" anchor="ctr">
+            <a:normAutofit/>
+          </a:bodyPr>
           <a:lstStyle/>
           <a:p>
             <a:pPr indent="0" marL="0">
@@ -3077,7 +3161,9 @@
           </a:ln>
         </p:spPr>
         <p:txBody>
-          <a:bodyPr/>
+          <a:bodyPr wrap="square">
+            <a:normAutofit/>
+          </a:bodyPr>
           <a:p/>
         </p:txBody>
       </p:sp>
@@ -3108,7 +3194,9 @@
           </a:ln>
         </p:spPr>
         <p:txBody>
-          <a:bodyPr/>
+          <a:bodyPr wrap="square">
+            <a:normAutofit/>
+          </a:bodyPr>
           <a:p/>
         </p:txBody>
       </p:sp>
@@ -3130,7 +3218,9 @@
           <a:ln/>
         </p:spPr>
         <p:txBody>
-          <a:bodyPr wrap="square" rtlCol="0" anchor="ctr"/>
+          <a:bodyPr wrap="square" rtlCol="0" anchor="ctr">
+            <a:normAutofit/>
+          </a:bodyPr>
           <a:lstStyle/>
           <a:p>
             <a:pPr algn="ctr" indent="0" marL="0">
@@ -3169,7 +3259,9 @@
           <a:ln/>
         </p:spPr>
         <p:txBody>
-          <a:bodyPr wrap="square" rtlCol="0" anchor="ctr"/>
+          <a:bodyPr wrap="square" rtlCol="0" anchor="ctr">
+            <a:normAutofit/>
+          </a:bodyPr>
           <a:lstStyle/>
           <a:p>
             <a:pPr indent="0" marL="0">
@@ -3217,7 +3309,9 @@
           </a:ln>
         </p:spPr>
         <p:txBody>
-          <a:bodyPr/>
+          <a:bodyPr wrap="square">
+            <a:normAutofit/>
+          </a:bodyPr>
           <a:p/>
         </p:txBody>
       </p:sp>
@@ -3248,7 +3342,9 @@
           </a:ln>
         </p:spPr>
         <p:txBody>
-          <a:bodyPr/>
+          <a:bodyPr wrap="square">
+            <a:normAutofit/>
+          </a:bodyPr>
           <a:p/>
         </p:txBody>
       </p:sp>
@@ -3270,7 +3366,9 @@
           <a:ln/>
         </p:spPr>
         <p:txBody>
-          <a:bodyPr wrap="square" rtlCol="0" anchor="ctr"/>
+          <a:bodyPr wrap="square" rtlCol="0" anchor="ctr">
+            <a:normAutofit/>
+          </a:bodyPr>
           <a:lstStyle/>
           <a:p>
             <a:pPr algn="ctr" indent="0" marL="0">
@@ -3309,7 +3407,9 @@
           <a:ln/>
         </p:spPr>
         <p:txBody>
-          <a:bodyPr wrap="square" rtlCol="0" anchor="ctr"/>
+          <a:bodyPr wrap="square" rtlCol="0" anchor="ctr">
+            <a:normAutofit/>
+          </a:bodyPr>
           <a:lstStyle/>
           <a:p>
             <a:pPr indent="0" marL="0">
@@ -3357,7 +3457,9 @@
           </a:ln>
         </p:spPr>
         <p:txBody>
-          <a:bodyPr/>
+          <a:bodyPr wrap="square">
+            <a:normAutofit/>
+          </a:bodyPr>
           <a:p/>
         </p:txBody>
       </p:sp>
@@ -3388,7 +3490,9 @@
           </a:ln>
         </p:spPr>
         <p:txBody>
-          <a:bodyPr/>
+          <a:bodyPr wrap="square">
+            <a:normAutofit/>
+          </a:bodyPr>
           <a:p/>
         </p:txBody>
       </p:sp>
@@ -3410,7 +3514,9 @@
           <a:ln/>
         </p:spPr>
         <p:txBody>
-          <a:bodyPr wrap="square" rtlCol="0" anchor="ctr"/>
+          <a:bodyPr wrap="square" rtlCol="0" anchor="ctr">
+            <a:normAutofit/>
+          </a:bodyPr>
           <a:lstStyle/>
           <a:p>
             <a:pPr algn="ctr" indent="0" marL="0">
@@ -3449,7 +3555,9 @@
           <a:ln/>
         </p:spPr>
         <p:txBody>
-          <a:bodyPr wrap="square" rtlCol="0" anchor="ctr"/>
+          <a:bodyPr wrap="square" rtlCol="0" anchor="ctr">
+            <a:normAutofit/>
+          </a:bodyPr>
           <a:lstStyle/>
           <a:p>
             <a:pPr indent="0" marL="0">
@@ -3497,7 +3605,9 @@
           </a:ln>
         </p:spPr>
         <p:txBody>
-          <a:bodyPr/>
+          <a:bodyPr wrap="square">
+            <a:normAutofit/>
+          </a:bodyPr>
           <a:p/>
         </p:txBody>
       </p:sp>
@@ -3528,7 +3638,9 @@
           </a:ln>
         </p:spPr>
         <p:txBody>
-          <a:bodyPr/>
+          <a:bodyPr wrap="square">
+            <a:normAutofit/>
+          </a:bodyPr>
           <a:p/>
         </p:txBody>
       </p:sp>
@@ -3550,7 +3662,9 @@
           <a:ln/>
         </p:spPr>
         <p:txBody>
-          <a:bodyPr wrap="square" rtlCol="0" anchor="ctr"/>
+          <a:bodyPr wrap="square" rtlCol="0" anchor="ctr">
+            <a:normAutofit/>
+          </a:bodyPr>
           <a:lstStyle/>
           <a:p>
             <a:pPr algn="ctr" indent="0" marL="0">
@@ -3589,7 +3703,9 @@
           <a:ln/>
         </p:spPr>
         <p:txBody>
-          <a:bodyPr wrap="square" rtlCol="0" anchor="ctr"/>
+          <a:bodyPr wrap="square" rtlCol="0" anchor="ctr">
+            <a:normAutofit/>
+          </a:bodyPr>
           <a:lstStyle/>
           <a:p>
             <a:pPr indent="0" marL="0">
@@ -3628,7 +3744,9 @@
           <a:ln/>
         </p:spPr>
         <p:txBody>
-          <a:bodyPr wrap="square" rtlCol="0" anchor="ctr"/>
+          <a:bodyPr wrap="square" rtlCol="0" anchor="ctr">
+            <a:normAutofit/>
+          </a:bodyPr>
           <a:lstStyle/>
           <a:p>
             <a:pPr algn="r" indent="0" marL="0">
@@ -3699,7 +3817,9 @@
           </a:ln>
         </p:spPr>
         <p:txBody>
-          <a:bodyPr/>
+          <a:bodyPr wrap="square">
+            <a:normAutofit/>
+          </a:bodyPr>
           <a:p/>
         </p:txBody>
       </p:sp>
@@ -3728,7 +3848,9 @@
           </a:ln>
         </p:spPr>
         <p:txBody>
-          <a:bodyPr/>
+          <a:bodyPr wrap="square">
+            <a:normAutofit/>
+          </a:bodyPr>
           <a:p/>
         </p:txBody>
       </p:sp>
@@ -3759,7 +3881,9 @@
           </a:ln>
         </p:spPr>
         <p:txBody>
-          <a:bodyPr/>
+          <a:bodyPr wrap="square">
+            <a:normAutofit/>
+          </a:bodyPr>
           <a:p/>
         </p:txBody>
       </p:sp>
@@ -3781,7 +3905,9 @@
           <a:ln/>
         </p:spPr>
         <p:txBody>
-          <a:bodyPr wrap="square" rtlCol="0" anchor="ctr"/>
+          <a:bodyPr wrap="square" rtlCol="0" anchor="ctr">
+            <a:normAutofit/>
+          </a:bodyPr>
           <a:lstStyle/>
           <a:p>
             <a:pPr algn="ctr" indent="0" marL="0">
@@ -3820,7 +3946,9 @@
           <a:ln/>
         </p:spPr>
         <p:txBody>
-          <a:bodyPr wrap="square" rtlCol="0" anchor="ctr"/>
+          <a:bodyPr wrap="square" rtlCol="0" anchor="ctr">
+            <a:normAutofit/>
+          </a:bodyPr>
           <a:lstStyle/>
           <a:p>
             <a:pPr indent="0" marL="0">
@@ -3859,7 +3987,9 @@
           <a:ln/>
         </p:spPr>
         <p:txBody>
-          <a:bodyPr wrap="square" rtlCol="0" anchor="ctr"/>
+          <a:bodyPr wrap="square" rtlCol="0" anchor="ctr">
+            <a:normAutofit/>
+          </a:bodyPr>
           <a:lstStyle/>
           <a:p>
             <a:pPr indent="0" marL="0">
@@ -3907,7 +4037,9 @@
           </a:ln>
         </p:spPr>
         <p:txBody>
-          <a:bodyPr/>
+          <a:bodyPr wrap="square">
+            <a:normAutofit/>
+          </a:bodyPr>
           <a:p/>
         </p:txBody>
       </p:sp>
@@ -3929,7 +4061,9 @@
           <a:ln/>
         </p:spPr>
         <p:txBody>
-          <a:bodyPr wrap="square" rtlCol="0" anchor="ctr"/>
+          <a:bodyPr wrap="square" rtlCol="0" anchor="ctr">
+            <a:normAutofit/>
+          </a:bodyPr>
           <a:lstStyle/>
           <a:p>
             <a:pPr indent="0" marL="0">
@@ -3968,7 +4102,9 @@
           <a:ln/>
         </p:spPr>
         <p:txBody>
-          <a:bodyPr wrap="square" rtlCol="0" anchor="t"/>
+          <a:bodyPr wrap="square" rtlCol="0" anchor="t">
+            <a:normAutofit/>
+          </a:bodyPr>
           <a:lstStyle/>
           <a:p>
             <a:pPr indent="0" marL="0">
@@ -4160,7 +4296,9 @@
           <a:ln/>
         </p:spPr>
         <p:txBody>
-          <a:bodyPr wrap="square" rtlCol="0" anchor="ctr"/>
+          <a:bodyPr wrap="square" rtlCol="0" anchor="ctr">
+            <a:normAutofit/>
+          </a:bodyPr>
           <a:lstStyle/>
           <a:p>
             <a:pPr algn="r" indent="0" marL="0">
@@ -4231,7 +4369,9 @@
           </a:ln>
         </p:spPr>
         <p:txBody>
-          <a:bodyPr/>
+          <a:bodyPr wrap="square">
+            <a:normAutofit/>
+          </a:bodyPr>
           <a:p/>
         </p:txBody>
       </p:sp>
@@ -4260,7 +4400,9 @@
           </a:ln>
         </p:spPr>
         <p:txBody>
-          <a:bodyPr/>
+          <a:bodyPr wrap="square">
+            <a:normAutofit/>
+          </a:bodyPr>
           <a:p/>
         </p:txBody>
       </p:sp>
@@ -4291,7 +4433,9 @@
           </a:ln>
         </p:spPr>
         <p:txBody>
-          <a:bodyPr/>
+          <a:bodyPr wrap="square">
+            <a:normAutofit/>
+          </a:bodyPr>
           <a:p/>
         </p:txBody>
       </p:sp>
@@ -4313,7 +4457,9 @@
           <a:ln/>
         </p:spPr>
         <p:txBody>
-          <a:bodyPr wrap="square" rtlCol="0" anchor="ctr"/>
+          <a:bodyPr wrap="square" rtlCol="0" anchor="ctr">
+            <a:normAutofit/>
+          </a:bodyPr>
           <a:lstStyle/>
           <a:p>
             <a:pPr algn="ctr" indent="0" marL="0">
@@ -4352,7 +4498,9 @@
           <a:ln/>
         </p:spPr>
         <p:txBody>
-          <a:bodyPr wrap="square" rtlCol="0" anchor="ctr"/>
+          <a:bodyPr wrap="square" rtlCol="0" anchor="ctr">
+            <a:normAutofit/>
+          </a:bodyPr>
           <a:lstStyle/>
           <a:p>
             <a:pPr indent="0" marL="0">
@@ -4391,7 +4539,9 @@
           <a:ln/>
         </p:spPr>
         <p:txBody>
-          <a:bodyPr wrap="square" rtlCol="0" anchor="ctr"/>
+          <a:bodyPr wrap="square" rtlCol="0" anchor="ctr">
+            <a:normAutofit/>
+          </a:bodyPr>
           <a:lstStyle/>
           <a:p>
             <a:pPr indent="0" marL="0">
@@ -4439,7 +4589,9 @@
           </a:ln>
         </p:spPr>
         <p:txBody>
-          <a:bodyPr/>
+          <a:bodyPr wrap="square">
+            <a:normAutofit/>
+          </a:bodyPr>
           <a:p/>
         </p:txBody>
       </p:sp>
@@ -4461,7 +4613,9 @@
           <a:ln/>
         </p:spPr>
         <p:txBody>
-          <a:bodyPr wrap="square" rtlCol="0" anchor="ctr"/>
+          <a:bodyPr wrap="square" rtlCol="0" anchor="ctr">
+            <a:normAutofit/>
+          </a:bodyPr>
           <a:lstStyle/>
           <a:p>
             <a:pPr indent="0" marL="0">
@@ -4500,7 +4654,9 @@
           <a:ln/>
         </p:spPr>
         <p:txBody>
-          <a:bodyPr wrap="square" rtlCol="0" anchor="ctr"/>
+          <a:bodyPr wrap="square" rtlCol="0" anchor="ctr">
+            <a:normAutofit/>
+          </a:bodyPr>
           <a:lstStyle/>
           <a:p>
             <a:pPr indent="0" marL="0">
@@ -4539,7 +4695,9 @@
           <a:ln/>
         </p:spPr>
         <p:txBody>
-          <a:bodyPr wrap="square" rtlCol="0" anchor="t"/>
+          <a:bodyPr wrap="square" rtlCol="0" anchor="t">
+            <a:normAutofit/>
+          </a:bodyPr>
           <a:lstStyle/>
           <a:p>
             <a:pPr indent="0" marL="0">
@@ -4578,7 +4736,9 @@
           <a:ln/>
         </p:spPr>
         <p:txBody>
-          <a:bodyPr wrap="square" rtlCol="0" anchor="ctr"/>
+          <a:bodyPr wrap="square" rtlCol="0" anchor="ctr">
+            <a:normAutofit/>
+          </a:bodyPr>
           <a:lstStyle/>
           <a:p>
             <a:pPr indent="0" marL="0">
@@ -4617,7 +4777,9 @@
           <a:ln/>
         </p:spPr>
         <p:txBody>
-          <a:bodyPr wrap="square" rtlCol="0" anchor="t"/>
+          <a:bodyPr wrap="square" rtlCol="0" anchor="t">
+            <a:normAutofit/>
+          </a:bodyPr>
           <a:lstStyle/>
           <a:p>
             <a:pPr indent="0" marL="0">
@@ -4656,7 +4818,9 @@
           <a:ln/>
         </p:spPr>
         <p:txBody>
-          <a:bodyPr wrap="square" rtlCol="0" anchor="ctr"/>
+          <a:bodyPr wrap="square" rtlCol="0" anchor="ctr">
+            <a:normAutofit/>
+          </a:bodyPr>
           <a:lstStyle/>
           <a:p>
             <a:pPr indent="0" marL="0">
@@ -4695,7 +4859,9 @@
           <a:ln/>
         </p:spPr>
         <p:txBody>
-          <a:bodyPr wrap="square" rtlCol="0" anchor="t"/>
+          <a:bodyPr wrap="square" rtlCol="0" anchor="t">
+            <a:normAutofit/>
+          </a:bodyPr>
           <a:lstStyle/>
           <a:p>
             <a:pPr indent="0" marL="0">
@@ -4743,7 +4909,9 @@
           </a:ln>
         </p:spPr>
         <p:txBody>
-          <a:bodyPr/>
+          <a:bodyPr wrap="square">
+            <a:normAutofit/>
+          </a:bodyPr>
           <a:p/>
         </p:txBody>
       </p:sp>
@@ -4765,7 +4933,9 @@
           <a:ln/>
         </p:spPr>
         <p:txBody>
-          <a:bodyPr wrap="square" rtlCol="0" anchor="ctr"/>
+          <a:bodyPr wrap="square" rtlCol="0" anchor="ctr">
+            <a:normAutofit/>
+          </a:bodyPr>
           <a:lstStyle/>
           <a:p>
             <a:pPr indent="0" marL="0">
@@ -4804,7 +4974,9 @@
           <a:ln/>
         </p:spPr>
         <p:txBody>
-          <a:bodyPr wrap="square" rtlCol="0" anchor="t"/>
+          <a:bodyPr wrap="square" rtlCol="0" anchor="t">
+            <a:normAutofit/>
+          </a:bodyPr>
           <a:lstStyle/>
           <a:p>
             <a:pPr indent="0" marL="0">
@@ -4843,7 +5015,9 @@
           <a:ln/>
         </p:spPr>
         <p:txBody>
-          <a:bodyPr wrap="square" rtlCol="0" anchor="t"/>
+          <a:bodyPr wrap="square" rtlCol="0" anchor="t">
+            <a:normAutofit/>
+          </a:bodyPr>
           <a:lstStyle/>
           <a:p>
             <a:pPr indent="0" marL="0">
@@ -4882,7 +5056,9 @@
           <a:ln/>
         </p:spPr>
         <p:txBody>
-          <a:bodyPr wrap="square" rtlCol="0" anchor="t"/>
+          <a:bodyPr wrap="square" rtlCol="0" anchor="t">
+            <a:normAutofit/>
+          </a:bodyPr>
           <a:lstStyle/>
           <a:p>
             <a:pPr indent="0" marL="0">
@@ -4921,7 +5097,9 @@
           <a:ln/>
         </p:spPr>
         <p:txBody>
-          <a:bodyPr wrap="square" rtlCol="0" anchor="ctr"/>
+          <a:bodyPr wrap="square" rtlCol="0" anchor="ctr">
+            <a:normAutofit/>
+          </a:bodyPr>
           <a:lstStyle/>
           <a:p>
             <a:pPr algn="r" indent="0" marL="0">
@@ -4992,7 +5170,9 @@
           </a:ln>
         </p:spPr>
         <p:txBody>
-          <a:bodyPr/>
+          <a:bodyPr wrap="square">
+            <a:normAutofit/>
+          </a:bodyPr>
           <a:p/>
         </p:txBody>
       </p:sp>
@@ -5021,7 +5201,9 @@
           </a:ln>
         </p:spPr>
         <p:txBody>
-          <a:bodyPr/>
+          <a:bodyPr wrap="square">
+            <a:normAutofit/>
+          </a:bodyPr>
           <a:p/>
         </p:txBody>
       </p:sp>
@@ -5052,7 +5234,9 @@
           </a:ln>
         </p:spPr>
         <p:txBody>
-          <a:bodyPr/>
+          <a:bodyPr wrap="square">
+            <a:normAutofit/>
+          </a:bodyPr>
           <a:p/>
         </p:txBody>
       </p:sp>
@@ -5074,7 +5258,9 @@
           <a:ln/>
         </p:spPr>
         <p:txBody>
-          <a:bodyPr wrap="square" rtlCol="0" anchor="ctr"/>
+          <a:bodyPr wrap="square" rtlCol="0" anchor="ctr">
+            <a:normAutofit/>
+          </a:bodyPr>
           <a:lstStyle/>
           <a:p>
             <a:pPr algn="ctr" indent="0" marL="0">
@@ -5113,7 +5299,9 @@
           <a:ln/>
         </p:spPr>
         <p:txBody>
-          <a:bodyPr wrap="square" rtlCol="0" anchor="ctr"/>
+          <a:bodyPr wrap="square" rtlCol="0" anchor="ctr">
+            <a:normAutofit/>
+          </a:bodyPr>
           <a:lstStyle/>
           <a:p>
             <a:pPr indent="0" marL="0">
@@ -5152,7 +5340,9 @@
           <a:ln/>
         </p:spPr>
         <p:txBody>
-          <a:bodyPr wrap="square" rtlCol="0" anchor="ctr"/>
+          <a:bodyPr wrap="square" rtlCol="0" anchor="ctr">
+            <a:normAutofit/>
+          </a:bodyPr>
           <a:lstStyle/>
           <a:p>
             <a:pPr indent="0" marL="0">
@@ -5200,7 +5390,9 @@
           </a:ln>
         </p:spPr>
         <p:txBody>
-          <a:bodyPr/>
+          <a:bodyPr wrap="square">
+            <a:normAutofit/>
+          </a:bodyPr>
           <a:p/>
         </p:txBody>
       </p:sp>
@@ -5222,7 +5414,9 @@
           <a:ln/>
         </p:spPr>
         <p:txBody>
-          <a:bodyPr wrap="square" rtlCol="0" anchor="ctr"/>
+          <a:bodyPr wrap="square" rtlCol="0" anchor="ctr">
+            <a:normAutofit/>
+          </a:bodyPr>
           <a:lstStyle/>
           <a:p>
             <a:pPr indent="0" marL="0">
@@ -5261,7 +5455,9 @@
           <a:ln/>
         </p:spPr>
         <p:txBody>
-          <a:bodyPr wrap="square" rtlCol="0" anchor="t"/>
+          <a:bodyPr wrap="square" rtlCol="0" anchor="t">
+            <a:normAutofit/>
+          </a:bodyPr>
           <a:lstStyle/>
           <a:p>
             <a:pPr indent="0" marL="0">
@@ -5589,7 +5785,9 @@
           <a:ln/>
         </p:spPr>
         <p:txBody>
-          <a:bodyPr wrap="square" rtlCol="0" anchor="ctr"/>
+          <a:bodyPr wrap="square" rtlCol="0" anchor="ctr">
+            <a:normAutofit/>
+          </a:bodyPr>
           <a:lstStyle/>
           <a:p>
             <a:pPr algn="r" indent="0" marL="0">
@@ -5660,7 +5858,9 @@
           </a:ln>
         </p:spPr>
         <p:txBody>
-          <a:bodyPr/>
+          <a:bodyPr wrap="square">
+            <a:normAutofit/>
+          </a:bodyPr>
           <a:p/>
         </p:txBody>
       </p:sp>
@@ -5689,7 +5889,9 @@
           </a:ln>
         </p:spPr>
         <p:txBody>
-          <a:bodyPr/>
+          <a:bodyPr wrap="square">
+            <a:normAutofit/>
+          </a:bodyPr>
           <a:p/>
         </p:txBody>
       </p:sp>
@@ -5720,7 +5922,9 @@
           </a:ln>
         </p:spPr>
         <p:txBody>
-          <a:bodyPr/>
+          <a:bodyPr wrap="square">
+            <a:normAutofit/>
+          </a:bodyPr>
           <a:p/>
         </p:txBody>
       </p:sp>
@@ -5742,7 +5946,9 @@
           <a:ln/>
         </p:spPr>
         <p:txBody>
-          <a:bodyPr wrap="square" rtlCol="0" anchor="ctr"/>
+          <a:bodyPr wrap="square" rtlCol="0" anchor="ctr">
+            <a:normAutofit/>
+          </a:bodyPr>
           <a:lstStyle/>
           <a:p>
             <a:pPr algn="ctr" indent="0" marL="0">
@@ -5781,7 +5987,9 @@
           <a:ln/>
         </p:spPr>
         <p:txBody>
-          <a:bodyPr wrap="square" rtlCol="0" anchor="ctr"/>
+          <a:bodyPr wrap="square" rtlCol="0" anchor="ctr">
+            <a:normAutofit/>
+          </a:bodyPr>
           <a:lstStyle/>
           <a:p>
             <a:pPr indent="0" marL="0">
@@ -5820,7 +6028,9 @@
           <a:ln/>
         </p:spPr>
         <p:txBody>
-          <a:bodyPr wrap="square" rtlCol="0" anchor="ctr"/>
+          <a:bodyPr wrap="square" rtlCol="0" anchor="ctr">
+            <a:normAutofit/>
+          </a:bodyPr>
           <a:lstStyle/>
           <a:p>
             <a:pPr indent="0" marL="0">
@@ -5868,7 +6078,9 @@
           </a:ln>
         </p:spPr>
         <p:txBody>
-          <a:bodyPr/>
+          <a:bodyPr wrap="square">
+            <a:normAutofit/>
+          </a:bodyPr>
           <a:p/>
         </p:txBody>
       </p:sp>
@@ -5890,7 +6102,9 @@
           <a:ln/>
         </p:spPr>
         <p:txBody>
-          <a:bodyPr wrap="square" rtlCol="0" anchor="ctr"/>
+          <a:bodyPr wrap="square" rtlCol="0" anchor="ctr">
+            <a:normAutofit/>
+          </a:bodyPr>
           <a:lstStyle/>
           <a:p>
             <a:pPr indent="0" marL="0">
@@ -5929,7 +6143,9 @@
           <a:ln/>
         </p:spPr>
         <p:txBody>
-          <a:bodyPr wrap="square" rtlCol="0" anchor="ctr"/>
+          <a:bodyPr wrap="square" rtlCol="0" anchor="ctr">
+            <a:normAutofit/>
+          </a:bodyPr>
           <a:lstStyle/>
           <a:p>
             <a:pPr indent="0" marL="0">
@@ -5968,7 +6184,9 @@
           <a:ln/>
         </p:spPr>
         <p:txBody>
-          <a:bodyPr wrap="square" rtlCol="0" anchor="t"/>
+          <a:bodyPr wrap="square" rtlCol="0" anchor="t">
+            <a:normAutofit/>
+          </a:bodyPr>
           <a:lstStyle/>
           <a:p>
             <a:pPr indent="0" marL="0">
@@ -6007,7 +6225,9 @@
           <a:ln/>
         </p:spPr>
         <p:txBody>
-          <a:bodyPr wrap="square" rtlCol="0" anchor="ctr"/>
+          <a:bodyPr wrap="square" rtlCol="0" anchor="ctr">
+            <a:normAutofit/>
+          </a:bodyPr>
           <a:lstStyle/>
           <a:p>
             <a:pPr indent="0" marL="0">
@@ -6046,7 +6266,9 @@
           <a:ln/>
         </p:spPr>
         <p:txBody>
-          <a:bodyPr wrap="square" rtlCol="0" anchor="t"/>
+          <a:bodyPr wrap="square" rtlCol="0" anchor="t">
+            <a:normAutofit/>
+          </a:bodyPr>
           <a:lstStyle/>
           <a:p>
             <a:pPr indent="0" marL="0">
@@ -6085,7 +6307,9 @@
           <a:ln/>
         </p:spPr>
         <p:txBody>
-          <a:bodyPr wrap="square" rtlCol="0" anchor="ctr"/>
+          <a:bodyPr wrap="square" rtlCol="0" anchor="ctr">
+            <a:normAutofit/>
+          </a:bodyPr>
           <a:lstStyle/>
           <a:p>
             <a:pPr indent="0" marL="0">
@@ -6124,7 +6348,9 @@
           <a:ln/>
         </p:spPr>
         <p:txBody>
-          <a:bodyPr wrap="square" rtlCol="0" anchor="t"/>
+          <a:bodyPr wrap="square" rtlCol="0" anchor="t">
+            <a:normAutofit/>
+          </a:bodyPr>
           <a:lstStyle/>
           <a:p>
             <a:pPr indent="0" marL="0">
@@ -6172,7 +6398,9 @@
           </a:ln>
         </p:spPr>
         <p:txBody>
-          <a:bodyPr/>
+          <a:bodyPr wrap="square">
+            <a:normAutofit/>
+          </a:bodyPr>
           <a:p/>
         </p:txBody>
       </p:sp>
@@ -6194,7 +6422,9 @@
           <a:ln/>
         </p:spPr>
         <p:txBody>
-          <a:bodyPr wrap="square" rtlCol="0" anchor="ctr"/>
+          <a:bodyPr wrap="square" rtlCol="0" anchor="ctr">
+            <a:normAutofit/>
+          </a:bodyPr>
           <a:lstStyle/>
           <a:p>
             <a:pPr indent="0" marL="0">
@@ -6233,7 +6463,9 @@
           <a:ln/>
         </p:spPr>
         <p:txBody>
-          <a:bodyPr wrap="square" rtlCol="0" anchor="t"/>
+          <a:bodyPr wrap="square" rtlCol="0" anchor="t">
+            <a:normAutofit/>
+          </a:bodyPr>
           <a:lstStyle/>
           <a:p>
             <a:pPr indent="0" marL="0">
@@ -6272,7 +6504,9 @@
           <a:ln/>
         </p:spPr>
         <p:txBody>
-          <a:bodyPr wrap="square" rtlCol="0" anchor="t"/>
+          <a:bodyPr wrap="square" rtlCol="0" anchor="t">
+            <a:normAutofit/>
+          </a:bodyPr>
           <a:lstStyle/>
           <a:p>
             <a:pPr indent="0" marL="0">
@@ -6311,7 +6545,9 @@
           <a:ln/>
         </p:spPr>
         <p:txBody>
-          <a:bodyPr wrap="square" rtlCol="0" anchor="t"/>
+          <a:bodyPr wrap="square" rtlCol="0" anchor="t">
+            <a:normAutofit/>
+          </a:bodyPr>
           <a:lstStyle/>
           <a:p>
             <a:pPr indent="0" marL="0">
@@ -6350,7 +6586,9 @@
           <a:ln/>
         </p:spPr>
         <p:txBody>
-          <a:bodyPr wrap="square" rtlCol="0" anchor="ctr"/>
+          <a:bodyPr wrap="square" rtlCol="0" anchor="ctr">
+            <a:normAutofit/>
+          </a:bodyPr>
           <a:lstStyle/>
           <a:p>
             <a:pPr algn="r" indent="0" marL="0">
@@ -6421,7 +6659,9 @@
           </a:ln>
         </p:spPr>
         <p:txBody>
-          <a:bodyPr/>
+          <a:bodyPr wrap="square">
+            <a:normAutofit/>
+          </a:bodyPr>
           <a:p/>
         </p:txBody>
       </p:sp>
@@ -6450,7 +6690,9 @@
           </a:ln>
         </p:spPr>
         <p:txBody>
-          <a:bodyPr/>
+          <a:bodyPr wrap="square">
+            <a:normAutofit/>
+          </a:bodyPr>
           <a:p/>
         </p:txBody>
       </p:sp>
@@ -6481,7 +6723,9 @@
           </a:ln>
         </p:spPr>
         <p:txBody>
-          <a:bodyPr/>
+          <a:bodyPr wrap="square">
+            <a:normAutofit/>
+          </a:bodyPr>
           <a:p/>
         </p:txBody>
       </p:sp>
@@ -6503,7 +6747,9 @@
           <a:ln/>
         </p:spPr>
         <p:txBody>
-          <a:bodyPr wrap="square" rtlCol="0" anchor="ctr"/>
+          <a:bodyPr wrap="square" rtlCol="0" anchor="ctr">
+            <a:normAutofit/>
+          </a:bodyPr>
           <a:lstStyle/>
           <a:p>
             <a:pPr algn="ctr" indent="0" marL="0">
@@ -6542,7 +6788,9 @@
           <a:ln/>
         </p:spPr>
         <p:txBody>
-          <a:bodyPr wrap="square" rtlCol="0" anchor="ctr"/>
+          <a:bodyPr wrap="square" rtlCol="0" anchor="ctr">
+            <a:normAutofit/>
+          </a:bodyPr>
           <a:lstStyle/>
           <a:p>
             <a:pPr indent="0" marL="0">
@@ -6581,7 +6829,9 @@
           <a:ln/>
         </p:spPr>
         <p:txBody>
-          <a:bodyPr wrap="square" rtlCol="0" anchor="ctr"/>
+          <a:bodyPr wrap="square" rtlCol="0" anchor="ctr">
+            <a:normAutofit/>
+          </a:bodyPr>
           <a:lstStyle/>
           <a:p>
             <a:pPr indent="0" marL="0">
@@ -6629,7 +6879,9 @@
           </a:ln>
         </p:spPr>
         <p:txBody>
-          <a:bodyPr/>
+          <a:bodyPr wrap="square">
+            <a:normAutofit/>
+          </a:bodyPr>
           <a:p/>
         </p:txBody>
       </p:sp>
@@ -6651,7 +6903,9 @@
           <a:ln/>
         </p:spPr>
         <p:txBody>
-          <a:bodyPr wrap="square" rtlCol="0" anchor="ctr"/>
+          <a:bodyPr wrap="square" rtlCol="0" anchor="ctr">
+            <a:normAutofit/>
+          </a:bodyPr>
           <a:lstStyle/>
           <a:p>
             <a:pPr indent="0" marL="0">
@@ -6690,7 +6944,9 @@
           <a:ln/>
         </p:spPr>
         <p:txBody>
-          <a:bodyPr wrap="square" rtlCol="0" anchor="ctr"/>
+          <a:bodyPr wrap="square" rtlCol="0" anchor="ctr">
+            <a:normAutofit/>
+          </a:bodyPr>
           <a:lstStyle/>
           <a:p>
             <a:pPr indent="0" marL="0">
@@ -6729,7 +6985,9 @@
           <a:ln/>
         </p:spPr>
         <p:txBody>
-          <a:bodyPr wrap="square" rtlCol="0" anchor="t"/>
+          <a:bodyPr wrap="square" rtlCol="0" anchor="t">
+            <a:normAutofit/>
+          </a:bodyPr>
           <a:lstStyle/>
           <a:p>
             <a:pPr indent="0" marL="0">
@@ -6768,7 +7026,9 @@
           <a:ln/>
         </p:spPr>
         <p:txBody>
-          <a:bodyPr wrap="square" rtlCol="0" anchor="ctr"/>
+          <a:bodyPr wrap="square" rtlCol="0" anchor="ctr">
+            <a:normAutofit/>
+          </a:bodyPr>
           <a:lstStyle/>
           <a:p>
             <a:pPr indent="0" marL="0">
@@ -6807,7 +7067,9 @@
           <a:ln/>
         </p:spPr>
         <p:txBody>
-          <a:bodyPr wrap="square" rtlCol="0" anchor="t"/>
+          <a:bodyPr wrap="square" rtlCol="0" anchor="t">
+            <a:normAutofit/>
+          </a:bodyPr>
           <a:lstStyle/>
           <a:p>
             <a:pPr indent="0" marL="0">
@@ -6846,7 +7108,9 @@
           <a:ln/>
         </p:spPr>
         <p:txBody>
-          <a:bodyPr wrap="square" rtlCol="0" anchor="ctr"/>
+          <a:bodyPr wrap="square" rtlCol="0" anchor="ctr">
+            <a:normAutofit/>
+          </a:bodyPr>
           <a:lstStyle/>
           <a:p>
             <a:pPr indent="0" marL="0">
@@ -6885,7 +7149,9 @@
           <a:ln/>
         </p:spPr>
         <p:txBody>
-          <a:bodyPr wrap="square" rtlCol="0" anchor="t"/>
+          <a:bodyPr wrap="square" rtlCol="0" anchor="t">
+            <a:normAutofit/>
+          </a:bodyPr>
           <a:lstStyle/>
           <a:p>
             <a:pPr indent="0" marL="0">
@@ -6933,7 +7199,9 @@
           </a:ln>
         </p:spPr>
         <p:txBody>
-          <a:bodyPr/>
+          <a:bodyPr wrap="square">
+            <a:normAutofit/>
+          </a:bodyPr>
           <a:p/>
         </p:txBody>
       </p:sp>
@@ -6955,7 +7223,9 @@
           <a:ln/>
         </p:spPr>
         <p:txBody>
-          <a:bodyPr wrap="square" rtlCol="0" anchor="ctr"/>
+          <a:bodyPr wrap="square" rtlCol="0" anchor="ctr">
+            <a:normAutofit/>
+          </a:bodyPr>
           <a:lstStyle/>
           <a:p>
             <a:pPr indent="0" marL="0">
@@ -6994,7 +7264,9 @@
           <a:ln/>
         </p:spPr>
         <p:txBody>
-          <a:bodyPr wrap="square" rtlCol="0" anchor="t"/>
+          <a:bodyPr wrap="square" rtlCol="0" anchor="t">
+            <a:normAutofit/>
+          </a:bodyPr>
           <a:lstStyle/>
           <a:p>
             <a:pPr indent="0" marL="0">
@@ -7033,7 +7305,9 @@
           <a:ln/>
         </p:spPr>
         <p:txBody>
-          <a:bodyPr wrap="square" rtlCol="0" anchor="t"/>
+          <a:bodyPr wrap="square" rtlCol="0" anchor="t">
+            <a:normAutofit/>
+          </a:bodyPr>
           <a:lstStyle/>
           <a:p>
             <a:pPr indent="0" marL="0">
@@ -7072,7 +7346,9 @@
           <a:ln/>
         </p:spPr>
         <p:txBody>
-          <a:bodyPr wrap="square" rtlCol="0" anchor="t"/>
+          <a:bodyPr wrap="square" rtlCol="0" anchor="t">
+            <a:normAutofit/>
+          </a:bodyPr>
           <a:lstStyle/>
           <a:p>
             <a:pPr indent="0" marL="0">
@@ -7111,7 +7387,9 @@
           <a:ln/>
         </p:spPr>
         <p:txBody>
-          <a:bodyPr wrap="square" rtlCol="0" anchor="ctr"/>
+          <a:bodyPr wrap="square" rtlCol="0" anchor="ctr">
+            <a:normAutofit/>
+          </a:bodyPr>
           <a:lstStyle/>
           <a:p>
             <a:pPr algn="r" indent="0" marL="0">

--- a/pptx_sessions_8_22/第21回_基礎編_講師用.pptx
+++ b/pptx_sessions_8_22/第21回_基礎編_講師用.pptx
@@ -1531,9 +1531,7 @@
           </a:ln>
         </p:spPr>
         <p:txBody>
-          <a:bodyPr wrap="square">
-            <a:normAutofit/>
-          </a:bodyPr>
+          <a:bodyPr/>
           <a:p/>
         </p:txBody>
       </p:sp>
@@ -1562,9 +1560,7 @@
           </a:ln>
         </p:spPr>
         <p:txBody>
-          <a:bodyPr wrap="square">
-            <a:normAutofit/>
-          </a:bodyPr>
+          <a:bodyPr/>
           <a:p/>
         </p:txBody>
       </p:sp>
@@ -1586,9 +1582,7 @@
           <a:ln/>
         </p:spPr>
         <p:txBody>
-          <a:bodyPr wrap="square" rtlCol="0" anchor="ctr">
-            <a:normAutofit/>
-          </a:bodyPr>
+          <a:bodyPr wrap="square" rtlCol="0" anchor="ctr"/>
           <a:lstStyle/>
           <a:p>
             <a:pPr algn="ctr" indent="0" marL="0">
@@ -1627,9 +1621,7 @@
           <a:ln/>
         </p:spPr>
         <p:txBody>
-          <a:bodyPr wrap="square" rtlCol="0" anchor="ctr">
-            <a:normAutofit/>
-          </a:bodyPr>
+          <a:bodyPr wrap="square" rtlCol="0" anchor="ctr"/>
           <a:lstStyle/>
           <a:p>
             <a:pPr algn="ctr" indent="0" marL="0">
@@ -1668,9 +1660,7 @@
           <a:ln/>
         </p:spPr>
         <p:txBody>
-          <a:bodyPr wrap="square" rtlCol="0" anchor="ctr">
-            <a:normAutofit/>
-          </a:bodyPr>
+          <a:bodyPr wrap="square" rtlCol="0" anchor="ctr"/>
           <a:lstStyle/>
           <a:p>
             <a:pPr algn="ctr" indent="0" marL="0">
@@ -1709,9 +1699,7 @@
           <a:ln/>
         </p:spPr>
         <p:txBody>
-          <a:bodyPr wrap="square" rtlCol="0" anchor="ctr">
-            <a:normAutofit/>
-          </a:bodyPr>
+          <a:bodyPr wrap="square" rtlCol="0" anchor="ctr"/>
           <a:lstStyle/>
           <a:p>
             <a:pPr algn="ctr" indent="0" marL="0">
@@ -1759,9 +1747,7 @@
           </a:ln>
         </p:spPr>
         <p:txBody>
-          <a:bodyPr wrap="square">
-            <a:normAutofit/>
-          </a:bodyPr>
+          <a:bodyPr/>
           <a:p/>
         </p:txBody>
       </p:sp>
@@ -1783,9 +1769,7 @@
           <a:ln/>
         </p:spPr>
         <p:txBody>
-          <a:bodyPr wrap="square" rtlCol="0" anchor="ctr">
-            <a:normAutofit/>
-          </a:bodyPr>
+          <a:bodyPr wrap="square" rtlCol="0" anchor="ctr"/>
           <a:lstStyle/>
           <a:p>
             <a:pPr algn="ctr" indent="0" marL="0">
@@ -1856,9 +1840,7 @@
           </a:ln>
         </p:spPr>
         <p:txBody>
-          <a:bodyPr wrap="square">
-            <a:normAutofit/>
-          </a:bodyPr>
+          <a:bodyPr/>
           <a:p/>
         </p:txBody>
       </p:sp>
@@ -1887,9 +1869,7 @@
           </a:ln>
         </p:spPr>
         <p:txBody>
-          <a:bodyPr wrap="square">
-            <a:normAutofit/>
-          </a:bodyPr>
+          <a:bodyPr/>
           <a:p/>
         </p:txBody>
       </p:sp>
@@ -1911,9 +1891,7 @@
           <a:ln/>
         </p:spPr>
         <p:txBody>
-          <a:bodyPr wrap="square" rtlCol="0" anchor="ctr">
-            <a:normAutofit/>
-          </a:bodyPr>
+          <a:bodyPr wrap="square" rtlCol="0" anchor="ctr"/>
           <a:lstStyle/>
           <a:p>
             <a:pPr indent="0" marL="0">
@@ -1952,9 +1930,7 @@
           <a:ln/>
         </p:spPr>
         <p:txBody>
-          <a:bodyPr wrap="square" rtlCol="0" anchor="ctr">
-            <a:normAutofit/>
-          </a:bodyPr>
+          <a:bodyPr wrap="square" rtlCol="0" anchor="ctr"/>
           <a:lstStyle/>
           <a:p>
             <a:pPr indent="0" marL="0">
@@ -2002,9 +1978,7 @@
           </a:ln>
         </p:spPr>
         <p:txBody>
-          <a:bodyPr wrap="square">
-            <a:normAutofit/>
-          </a:bodyPr>
+          <a:bodyPr/>
           <a:p/>
         </p:txBody>
       </p:sp>
@@ -2026,9 +2000,7 @@
           <a:ln/>
         </p:spPr>
         <p:txBody>
-          <a:bodyPr wrap="square" rtlCol="0" anchor="ctr">
-            <a:normAutofit/>
-          </a:bodyPr>
+          <a:bodyPr wrap="square" rtlCol="0" anchor="ctr"/>
           <a:lstStyle/>
           <a:p>
             <a:pPr indent="0" marL="0">
@@ -2067,9 +2039,7 @@
           <a:ln/>
         </p:spPr>
         <p:txBody>
-          <a:bodyPr wrap="square" rtlCol="0" anchor="ctr">
-            <a:normAutofit/>
-          </a:bodyPr>
+          <a:bodyPr wrap="square" rtlCol="0" anchor="ctr"/>
           <a:lstStyle/>
           <a:p>
             <a:pPr indent="0" marL="0">
@@ -2108,9 +2078,7 @@
           <a:ln/>
         </p:spPr>
         <p:txBody>
-          <a:bodyPr wrap="square" rtlCol="0" anchor="ctr">
-            <a:normAutofit/>
-          </a:bodyPr>
+          <a:bodyPr wrap="square" rtlCol="0" anchor="ctr"/>
           <a:lstStyle/>
           <a:p>
             <a:pPr indent="0" marL="0">
@@ -2158,9 +2126,7 @@
           </a:ln>
         </p:spPr>
         <p:txBody>
-          <a:bodyPr wrap="square">
-            <a:normAutofit/>
-          </a:bodyPr>
+          <a:bodyPr/>
           <a:p/>
         </p:txBody>
       </p:sp>
@@ -2182,9 +2148,7 @@
           <a:ln/>
         </p:spPr>
         <p:txBody>
-          <a:bodyPr wrap="square" rtlCol="0" anchor="ctr">
-            <a:normAutofit/>
-          </a:bodyPr>
+          <a:bodyPr wrap="square" rtlCol="0" anchor="ctr"/>
           <a:lstStyle/>
           <a:p>
             <a:pPr indent="0" marL="0">
@@ -2223,9 +2187,7 @@
           <a:ln/>
         </p:spPr>
         <p:txBody>
-          <a:bodyPr wrap="square" rtlCol="0" anchor="ctr">
-            <a:normAutofit/>
-          </a:bodyPr>
+          <a:bodyPr wrap="square" rtlCol="0" anchor="ctr"/>
           <a:lstStyle/>
           <a:p>
             <a:pPr indent="0" marL="0">
@@ -2264,9 +2226,7 @@
           <a:ln/>
         </p:spPr>
         <p:txBody>
-          <a:bodyPr wrap="square" rtlCol="0" anchor="ctr">
-            <a:normAutofit/>
-          </a:bodyPr>
+          <a:bodyPr wrap="square" rtlCol="0" anchor="ctr"/>
           <a:lstStyle/>
           <a:p>
             <a:pPr indent="0" marL="0">
@@ -2314,9 +2274,7 @@
           </a:ln>
         </p:spPr>
         <p:txBody>
-          <a:bodyPr wrap="square">
-            <a:normAutofit/>
-          </a:bodyPr>
+          <a:bodyPr/>
           <a:p/>
         </p:txBody>
       </p:sp>
@@ -2338,9 +2296,7 @@
           <a:ln/>
         </p:spPr>
         <p:txBody>
-          <a:bodyPr wrap="square" rtlCol="0" anchor="ctr">
-            <a:normAutofit/>
-          </a:bodyPr>
+          <a:bodyPr wrap="square" rtlCol="0" anchor="ctr"/>
           <a:lstStyle/>
           <a:p>
             <a:pPr indent="0" marL="0">
@@ -2379,9 +2335,7 @@
           <a:ln/>
         </p:spPr>
         <p:txBody>
-          <a:bodyPr wrap="square" rtlCol="0" anchor="ctr">
-            <a:normAutofit/>
-          </a:bodyPr>
+          <a:bodyPr wrap="square" rtlCol="0" anchor="ctr"/>
           <a:lstStyle/>
           <a:p>
             <a:pPr indent="0" marL="0">
@@ -2420,9 +2374,7 @@
           <a:ln/>
         </p:spPr>
         <p:txBody>
-          <a:bodyPr wrap="square" rtlCol="0" anchor="ctr">
-            <a:normAutofit/>
-          </a:bodyPr>
+          <a:bodyPr wrap="square" rtlCol="0" anchor="ctr"/>
           <a:lstStyle/>
           <a:p>
             <a:pPr indent="0" marL="0">
@@ -2461,9 +2413,7 @@
           <a:ln/>
         </p:spPr>
         <p:txBody>
-          <a:bodyPr wrap="square" rtlCol="0" anchor="ctr">
-            <a:normAutofit/>
-          </a:bodyPr>
+          <a:bodyPr wrap="square" rtlCol="0" anchor="ctr"/>
           <a:lstStyle/>
           <a:p>
             <a:pPr algn="r" indent="0" marL="0">
@@ -2534,9 +2484,7 @@
           </a:ln>
         </p:spPr>
         <p:txBody>
-          <a:bodyPr wrap="square">
-            <a:normAutofit/>
-          </a:bodyPr>
+          <a:bodyPr/>
           <a:p/>
         </p:txBody>
       </p:sp>
@@ -2565,9 +2513,7 @@
           </a:ln>
         </p:spPr>
         <p:txBody>
-          <a:bodyPr wrap="square">
-            <a:normAutofit/>
-          </a:bodyPr>
+          <a:bodyPr/>
           <a:p/>
         </p:txBody>
       </p:sp>
@@ -2589,9 +2535,7 @@
           <a:ln/>
         </p:spPr>
         <p:txBody>
-          <a:bodyPr wrap="square" rtlCol="0" anchor="ctr">
-            <a:normAutofit/>
-          </a:bodyPr>
+          <a:bodyPr wrap="square" rtlCol="0" anchor="ctr"/>
           <a:lstStyle/>
           <a:p>
             <a:pPr indent="0" marL="0">
@@ -2630,9 +2574,7 @@
           <a:ln/>
         </p:spPr>
         <p:txBody>
-          <a:bodyPr wrap="square" rtlCol="0" anchor="ctr">
-            <a:normAutofit/>
-          </a:bodyPr>
+          <a:bodyPr wrap="square" rtlCol="0" anchor="ctr"/>
           <a:lstStyle/>
           <a:p>
             <a:pPr indent="0" marL="0">
@@ -2678,9 +2620,7 @@
           </a:ln>
         </p:spPr>
         <p:txBody>
-          <a:bodyPr wrap="square">
-            <a:normAutofit/>
-          </a:bodyPr>
+          <a:bodyPr/>
           <a:p/>
         </p:txBody>
       </p:sp>
@@ -2711,9 +2651,7 @@
           </a:ln>
         </p:spPr>
         <p:txBody>
-          <a:bodyPr wrap="square">
-            <a:normAutofit/>
-          </a:bodyPr>
+          <a:bodyPr/>
           <a:p/>
         </p:txBody>
       </p:sp>
@@ -2735,9 +2673,7 @@
           <a:ln/>
         </p:spPr>
         <p:txBody>
-          <a:bodyPr wrap="square" rtlCol="0" anchor="ctr">
-            <a:normAutofit/>
-          </a:bodyPr>
+          <a:bodyPr wrap="square" rtlCol="0" anchor="ctr"/>
           <a:lstStyle/>
           <a:p>
             <a:pPr algn="ctr" indent="0" marL="0">
@@ -2776,9 +2712,7 @@
           <a:ln/>
         </p:spPr>
         <p:txBody>
-          <a:bodyPr wrap="square" rtlCol="0" anchor="ctr">
-            <a:normAutofit/>
-          </a:bodyPr>
+          <a:bodyPr wrap="square" rtlCol="0" anchor="ctr"/>
           <a:lstStyle/>
           <a:p>
             <a:pPr indent="0" marL="0">
@@ -2824,9 +2758,7 @@
           </a:ln>
         </p:spPr>
         <p:txBody>
-          <a:bodyPr wrap="square">
-            <a:normAutofit/>
-          </a:bodyPr>
+          <a:bodyPr/>
           <a:p/>
         </p:txBody>
       </p:sp>
@@ -2857,9 +2789,7 @@
           </a:ln>
         </p:spPr>
         <p:txBody>
-          <a:bodyPr wrap="square">
-            <a:normAutofit/>
-          </a:bodyPr>
+          <a:bodyPr/>
           <a:p/>
         </p:txBody>
       </p:sp>
@@ -2881,9 +2811,7 @@
           <a:ln/>
         </p:spPr>
         <p:txBody>
-          <a:bodyPr wrap="square" rtlCol="0" anchor="ctr">
-            <a:normAutofit/>
-          </a:bodyPr>
+          <a:bodyPr wrap="square" rtlCol="0" anchor="ctr"/>
           <a:lstStyle/>
           <a:p>
             <a:pPr algn="ctr" indent="0" marL="0">
@@ -2922,9 +2850,7 @@
           <a:ln/>
         </p:spPr>
         <p:txBody>
-          <a:bodyPr wrap="square" rtlCol="0" anchor="ctr">
-            <a:normAutofit/>
-          </a:bodyPr>
+          <a:bodyPr wrap="square" rtlCol="0" anchor="ctr"/>
           <a:lstStyle/>
           <a:p>
             <a:pPr indent="0" marL="0">
@@ -2963,9 +2889,7 @@
           <a:ln/>
         </p:spPr>
         <p:txBody>
-          <a:bodyPr wrap="square" rtlCol="0" anchor="ctr">
-            <a:normAutofit/>
-          </a:bodyPr>
+          <a:bodyPr wrap="square" rtlCol="0" anchor="ctr"/>
           <a:lstStyle/>
           <a:p>
             <a:pPr indent="0" marL="0">
@@ -3013,9 +2937,7 @@
           </a:ln>
         </p:spPr>
         <p:txBody>
-          <a:bodyPr wrap="square">
-            <a:normAutofit/>
-          </a:bodyPr>
+          <a:bodyPr/>
           <a:p/>
         </p:txBody>
       </p:sp>
@@ -3046,9 +2968,7 @@
           </a:ln>
         </p:spPr>
         <p:txBody>
-          <a:bodyPr wrap="square">
-            <a:normAutofit/>
-          </a:bodyPr>
+          <a:bodyPr/>
           <a:p/>
         </p:txBody>
       </p:sp>
@@ -3070,9 +2990,7 @@
           <a:ln/>
         </p:spPr>
         <p:txBody>
-          <a:bodyPr wrap="square" rtlCol="0" anchor="ctr">
-            <a:normAutofit/>
-          </a:bodyPr>
+          <a:bodyPr wrap="square" rtlCol="0" anchor="ctr"/>
           <a:lstStyle/>
           <a:p>
             <a:pPr algn="ctr" indent="0" marL="0">
@@ -3111,9 +3029,7 @@
           <a:ln/>
         </p:spPr>
         <p:txBody>
-          <a:bodyPr wrap="square" rtlCol="0" anchor="ctr">
-            <a:normAutofit/>
-          </a:bodyPr>
+          <a:bodyPr wrap="square" rtlCol="0" anchor="ctr"/>
           <a:lstStyle/>
           <a:p>
             <a:pPr indent="0" marL="0">
@@ -3161,9 +3077,7 @@
           </a:ln>
         </p:spPr>
         <p:txBody>
-          <a:bodyPr wrap="square">
-            <a:normAutofit/>
-          </a:bodyPr>
+          <a:bodyPr/>
           <a:p/>
         </p:txBody>
       </p:sp>
@@ -3194,9 +3108,7 @@
           </a:ln>
         </p:spPr>
         <p:txBody>
-          <a:bodyPr wrap="square">
-            <a:normAutofit/>
-          </a:bodyPr>
+          <a:bodyPr/>
           <a:p/>
         </p:txBody>
       </p:sp>
@@ -3218,9 +3130,7 @@
           <a:ln/>
         </p:spPr>
         <p:txBody>
-          <a:bodyPr wrap="square" rtlCol="0" anchor="ctr">
-            <a:normAutofit/>
-          </a:bodyPr>
+          <a:bodyPr wrap="square" rtlCol="0" anchor="ctr"/>
           <a:lstStyle/>
           <a:p>
             <a:pPr algn="ctr" indent="0" marL="0">
@@ -3259,9 +3169,7 @@
           <a:ln/>
         </p:spPr>
         <p:txBody>
-          <a:bodyPr wrap="square" rtlCol="0" anchor="ctr">
-            <a:normAutofit/>
-          </a:bodyPr>
+          <a:bodyPr wrap="square" rtlCol="0" anchor="ctr"/>
           <a:lstStyle/>
           <a:p>
             <a:pPr indent="0" marL="0">
@@ -3309,9 +3217,7 @@
           </a:ln>
         </p:spPr>
         <p:txBody>
-          <a:bodyPr wrap="square">
-            <a:normAutofit/>
-          </a:bodyPr>
+          <a:bodyPr/>
           <a:p/>
         </p:txBody>
       </p:sp>
@@ -3342,9 +3248,7 @@
           </a:ln>
         </p:spPr>
         <p:txBody>
-          <a:bodyPr wrap="square">
-            <a:normAutofit/>
-          </a:bodyPr>
+          <a:bodyPr/>
           <a:p/>
         </p:txBody>
       </p:sp>
@@ -3366,9 +3270,7 @@
           <a:ln/>
         </p:spPr>
         <p:txBody>
-          <a:bodyPr wrap="square" rtlCol="0" anchor="ctr">
-            <a:normAutofit/>
-          </a:bodyPr>
+          <a:bodyPr wrap="square" rtlCol="0" anchor="ctr"/>
           <a:lstStyle/>
           <a:p>
             <a:pPr algn="ctr" indent="0" marL="0">
@@ -3407,9 +3309,7 @@
           <a:ln/>
         </p:spPr>
         <p:txBody>
-          <a:bodyPr wrap="square" rtlCol="0" anchor="ctr">
-            <a:normAutofit/>
-          </a:bodyPr>
+          <a:bodyPr wrap="square" rtlCol="0" anchor="ctr"/>
           <a:lstStyle/>
           <a:p>
             <a:pPr indent="0" marL="0">
@@ -3457,9 +3357,7 @@
           </a:ln>
         </p:spPr>
         <p:txBody>
-          <a:bodyPr wrap="square">
-            <a:normAutofit/>
-          </a:bodyPr>
+          <a:bodyPr/>
           <a:p/>
         </p:txBody>
       </p:sp>
@@ -3490,9 +3388,7 @@
           </a:ln>
         </p:spPr>
         <p:txBody>
-          <a:bodyPr wrap="square">
-            <a:normAutofit/>
-          </a:bodyPr>
+          <a:bodyPr/>
           <a:p/>
         </p:txBody>
       </p:sp>
@@ -3514,9 +3410,7 @@
           <a:ln/>
         </p:spPr>
         <p:txBody>
-          <a:bodyPr wrap="square" rtlCol="0" anchor="ctr">
-            <a:normAutofit/>
-          </a:bodyPr>
+          <a:bodyPr wrap="square" rtlCol="0" anchor="ctr"/>
           <a:lstStyle/>
           <a:p>
             <a:pPr algn="ctr" indent="0" marL="0">
@@ -3555,9 +3449,7 @@
           <a:ln/>
         </p:spPr>
         <p:txBody>
-          <a:bodyPr wrap="square" rtlCol="0" anchor="ctr">
-            <a:normAutofit/>
-          </a:bodyPr>
+          <a:bodyPr wrap="square" rtlCol="0" anchor="ctr"/>
           <a:lstStyle/>
           <a:p>
             <a:pPr indent="0" marL="0">
@@ -3605,9 +3497,7 @@
           </a:ln>
         </p:spPr>
         <p:txBody>
-          <a:bodyPr wrap="square">
-            <a:normAutofit/>
-          </a:bodyPr>
+          <a:bodyPr/>
           <a:p/>
         </p:txBody>
       </p:sp>
@@ -3638,9 +3528,7 @@
           </a:ln>
         </p:spPr>
         <p:txBody>
-          <a:bodyPr wrap="square">
-            <a:normAutofit/>
-          </a:bodyPr>
+          <a:bodyPr/>
           <a:p/>
         </p:txBody>
       </p:sp>
@@ -3662,9 +3550,7 @@
           <a:ln/>
         </p:spPr>
         <p:txBody>
-          <a:bodyPr wrap="square" rtlCol="0" anchor="ctr">
-            <a:normAutofit/>
-          </a:bodyPr>
+          <a:bodyPr wrap="square" rtlCol="0" anchor="ctr"/>
           <a:lstStyle/>
           <a:p>
             <a:pPr algn="ctr" indent="0" marL="0">
@@ -3703,9 +3589,7 @@
           <a:ln/>
         </p:spPr>
         <p:txBody>
-          <a:bodyPr wrap="square" rtlCol="0" anchor="ctr">
-            <a:normAutofit/>
-          </a:bodyPr>
+          <a:bodyPr wrap="square" rtlCol="0" anchor="ctr"/>
           <a:lstStyle/>
           <a:p>
             <a:pPr indent="0" marL="0">
@@ -3744,9 +3628,7 @@
           <a:ln/>
         </p:spPr>
         <p:txBody>
-          <a:bodyPr wrap="square" rtlCol="0" anchor="ctr">
-            <a:normAutofit/>
-          </a:bodyPr>
+          <a:bodyPr wrap="square" rtlCol="0" anchor="ctr"/>
           <a:lstStyle/>
           <a:p>
             <a:pPr algn="r" indent="0" marL="0">
@@ -3817,9 +3699,7 @@
           </a:ln>
         </p:spPr>
         <p:txBody>
-          <a:bodyPr wrap="square">
-            <a:normAutofit/>
-          </a:bodyPr>
+          <a:bodyPr/>
           <a:p/>
         </p:txBody>
       </p:sp>
@@ -3848,9 +3728,7 @@
           </a:ln>
         </p:spPr>
         <p:txBody>
-          <a:bodyPr wrap="square">
-            <a:normAutofit/>
-          </a:bodyPr>
+          <a:bodyPr/>
           <a:p/>
         </p:txBody>
       </p:sp>
@@ -3881,9 +3759,7 @@
           </a:ln>
         </p:spPr>
         <p:txBody>
-          <a:bodyPr wrap="square">
-            <a:normAutofit/>
-          </a:bodyPr>
+          <a:bodyPr/>
           <a:p/>
         </p:txBody>
       </p:sp>
@@ -3905,9 +3781,7 @@
           <a:ln/>
         </p:spPr>
         <p:txBody>
-          <a:bodyPr wrap="square" rtlCol="0" anchor="ctr">
-            <a:normAutofit/>
-          </a:bodyPr>
+          <a:bodyPr wrap="square" rtlCol="0" anchor="ctr"/>
           <a:lstStyle/>
           <a:p>
             <a:pPr algn="ctr" indent="0" marL="0">
@@ -3946,9 +3820,7 @@
           <a:ln/>
         </p:spPr>
         <p:txBody>
-          <a:bodyPr wrap="square" rtlCol="0" anchor="ctr">
-            <a:normAutofit/>
-          </a:bodyPr>
+          <a:bodyPr wrap="square" rtlCol="0" anchor="ctr"/>
           <a:lstStyle/>
           <a:p>
             <a:pPr indent="0" marL="0">
@@ -3987,9 +3859,7 @@
           <a:ln/>
         </p:spPr>
         <p:txBody>
-          <a:bodyPr wrap="square" rtlCol="0" anchor="ctr">
-            <a:normAutofit/>
-          </a:bodyPr>
+          <a:bodyPr wrap="square" rtlCol="0" anchor="ctr"/>
           <a:lstStyle/>
           <a:p>
             <a:pPr indent="0" marL="0">
@@ -4037,9 +3907,7 @@
           </a:ln>
         </p:spPr>
         <p:txBody>
-          <a:bodyPr wrap="square">
-            <a:normAutofit/>
-          </a:bodyPr>
+          <a:bodyPr/>
           <a:p/>
         </p:txBody>
       </p:sp>
@@ -4061,9 +3929,7 @@
           <a:ln/>
         </p:spPr>
         <p:txBody>
-          <a:bodyPr wrap="square" rtlCol="0" anchor="ctr">
-            <a:normAutofit/>
-          </a:bodyPr>
+          <a:bodyPr wrap="square" rtlCol="0" anchor="ctr"/>
           <a:lstStyle/>
           <a:p>
             <a:pPr indent="0" marL="0">
@@ -4102,9 +3968,7 @@
           <a:ln/>
         </p:spPr>
         <p:txBody>
-          <a:bodyPr wrap="square" rtlCol="0" anchor="t">
-            <a:normAutofit/>
-          </a:bodyPr>
+          <a:bodyPr wrap="square" rtlCol="0" anchor="t"/>
           <a:lstStyle/>
           <a:p>
             <a:pPr indent="0" marL="0">
@@ -4296,9 +4160,7 @@
           <a:ln/>
         </p:spPr>
         <p:txBody>
-          <a:bodyPr wrap="square" rtlCol="0" anchor="ctr">
-            <a:normAutofit/>
-          </a:bodyPr>
+          <a:bodyPr wrap="square" rtlCol="0" anchor="ctr"/>
           <a:lstStyle/>
           <a:p>
             <a:pPr algn="r" indent="0" marL="0">
@@ -4369,9 +4231,7 @@
           </a:ln>
         </p:spPr>
         <p:txBody>
-          <a:bodyPr wrap="square">
-            <a:normAutofit/>
-          </a:bodyPr>
+          <a:bodyPr/>
           <a:p/>
         </p:txBody>
       </p:sp>
@@ -4400,9 +4260,7 @@
           </a:ln>
         </p:spPr>
         <p:txBody>
-          <a:bodyPr wrap="square">
-            <a:normAutofit/>
-          </a:bodyPr>
+          <a:bodyPr/>
           <a:p/>
         </p:txBody>
       </p:sp>
@@ -4433,9 +4291,7 @@
           </a:ln>
         </p:spPr>
         <p:txBody>
-          <a:bodyPr wrap="square">
-            <a:normAutofit/>
-          </a:bodyPr>
+          <a:bodyPr/>
           <a:p/>
         </p:txBody>
       </p:sp>
@@ -4457,9 +4313,7 @@
           <a:ln/>
         </p:spPr>
         <p:txBody>
-          <a:bodyPr wrap="square" rtlCol="0" anchor="ctr">
-            <a:normAutofit/>
-          </a:bodyPr>
+          <a:bodyPr wrap="square" rtlCol="0" anchor="ctr"/>
           <a:lstStyle/>
           <a:p>
             <a:pPr algn="ctr" indent="0" marL="0">
@@ -4498,9 +4352,7 @@
           <a:ln/>
         </p:spPr>
         <p:txBody>
-          <a:bodyPr wrap="square" rtlCol="0" anchor="ctr">
-            <a:normAutofit/>
-          </a:bodyPr>
+          <a:bodyPr wrap="square" rtlCol="0" anchor="ctr"/>
           <a:lstStyle/>
           <a:p>
             <a:pPr indent="0" marL="0">
@@ -4539,9 +4391,7 @@
           <a:ln/>
         </p:spPr>
         <p:txBody>
-          <a:bodyPr wrap="square" rtlCol="0" anchor="ctr">
-            <a:normAutofit/>
-          </a:bodyPr>
+          <a:bodyPr wrap="square" rtlCol="0" anchor="ctr"/>
           <a:lstStyle/>
           <a:p>
             <a:pPr indent="0" marL="0">
@@ -4589,9 +4439,7 @@
           </a:ln>
         </p:spPr>
         <p:txBody>
-          <a:bodyPr wrap="square">
-            <a:normAutofit/>
-          </a:bodyPr>
+          <a:bodyPr/>
           <a:p/>
         </p:txBody>
       </p:sp>
@@ -4613,9 +4461,7 @@
           <a:ln/>
         </p:spPr>
         <p:txBody>
-          <a:bodyPr wrap="square" rtlCol="0" anchor="ctr">
-            <a:normAutofit/>
-          </a:bodyPr>
+          <a:bodyPr wrap="square" rtlCol="0" anchor="ctr"/>
           <a:lstStyle/>
           <a:p>
             <a:pPr indent="0" marL="0">
@@ -4654,9 +4500,7 @@
           <a:ln/>
         </p:spPr>
         <p:txBody>
-          <a:bodyPr wrap="square" rtlCol="0" anchor="ctr">
-            <a:normAutofit/>
-          </a:bodyPr>
+          <a:bodyPr wrap="square" rtlCol="0" anchor="ctr"/>
           <a:lstStyle/>
           <a:p>
             <a:pPr indent="0" marL="0">
@@ -4695,9 +4539,7 @@
           <a:ln/>
         </p:spPr>
         <p:txBody>
-          <a:bodyPr wrap="square" rtlCol="0" anchor="t">
-            <a:normAutofit/>
-          </a:bodyPr>
+          <a:bodyPr wrap="square" rtlCol="0" anchor="t"/>
           <a:lstStyle/>
           <a:p>
             <a:pPr indent="0" marL="0">
@@ -4736,9 +4578,7 @@
           <a:ln/>
         </p:spPr>
         <p:txBody>
-          <a:bodyPr wrap="square" rtlCol="0" anchor="ctr">
-            <a:normAutofit/>
-          </a:bodyPr>
+          <a:bodyPr wrap="square" rtlCol="0" anchor="ctr"/>
           <a:lstStyle/>
           <a:p>
             <a:pPr indent="0" marL="0">
@@ -4777,9 +4617,7 @@
           <a:ln/>
         </p:spPr>
         <p:txBody>
-          <a:bodyPr wrap="square" rtlCol="0" anchor="t">
-            <a:normAutofit/>
-          </a:bodyPr>
+          <a:bodyPr wrap="square" rtlCol="0" anchor="t"/>
           <a:lstStyle/>
           <a:p>
             <a:pPr indent="0" marL="0">
@@ -4818,9 +4656,7 @@
           <a:ln/>
         </p:spPr>
         <p:txBody>
-          <a:bodyPr wrap="square" rtlCol="0" anchor="ctr">
-            <a:normAutofit/>
-          </a:bodyPr>
+          <a:bodyPr wrap="square" rtlCol="0" anchor="ctr"/>
           <a:lstStyle/>
           <a:p>
             <a:pPr indent="0" marL="0">
@@ -4859,9 +4695,7 @@
           <a:ln/>
         </p:spPr>
         <p:txBody>
-          <a:bodyPr wrap="square" rtlCol="0" anchor="t">
-            <a:normAutofit/>
-          </a:bodyPr>
+          <a:bodyPr wrap="square" rtlCol="0" anchor="t"/>
           <a:lstStyle/>
           <a:p>
             <a:pPr indent="0" marL="0">
@@ -4909,9 +4743,7 @@
           </a:ln>
         </p:spPr>
         <p:txBody>
-          <a:bodyPr wrap="square">
-            <a:normAutofit/>
-          </a:bodyPr>
+          <a:bodyPr/>
           <a:p/>
         </p:txBody>
       </p:sp>
@@ -4933,9 +4765,7 @@
           <a:ln/>
         </p:spPr>
         <p:txBody>
-          <a:bodyPr wrap="square" rtlCol="0" anchor="ctr">
-            <a:normAutofit/>
-          </a:bodyPr>
+          <a:bodyPr wrap="square" rtlCol="0" anchor="ctr"/>
           <a:lstStyle/>
           <a:p>
             <a:pPr indent="0" marL="0">
@@ -4974,9 +4804,7 @@
           <a:ln/>
         </p:spPr>
         <p:txBody>
-          <a:bodyPr wrap="square" rtlCol="0" anchor="t">
-            <a:normAutofit/>
-          </a:bodyPr>
+          <a:bodyPr wrap="square" rtlCol="0" anchor="t"/>
           <a:lstStyle/>
           <a:p>
             <a:pPr indent="0" marL="0">
@@ -5015,9 +4843,7 @@
           <a:ln/>
         </p:spPr>
         <p:txBody>
-          <a:bodyPr wrap="square" rtlCol="0" anchor="t">
-            <a:normAutofit/>
-          </a:bodyPr>
+          <a:bodyPr wrap="square" rtlCol="0" anchor="t"/>
           <a:lstStyle/>
           <a:p>
             <a:pPr indent="0" marL="0">
@@ -5056,9 +4882,7 @@
           <a:ln/>
         </p:spPr>
         <p:txBody>
-          <a:bodyPr wrap="square" rtlCol="0" anchor="t">
-            <a:normAutofit/>
-          </a:bodyPr>
+          <a:bodyPr wrap="square" rtlCol="0" anchor="t"/>
           <a:lstStyle/>
           <a:p>
             <a:pPr indent="0" marL="0">
@@ -5097,9 +4921,7 @@
           <a:ln/>
         </p:spPr>
         <p:txBody>
-          <a:bodyPr wrap="square" rtlCol="0" anchor="ctr">
-            <a:normAutofit/>
-          </a:bodyPr>
+          <a:bodyPr wrap="square" rtlCol="0" anchor="ctr"/>
           <a:lstStyle/>
           <a:p>
             <a:pPr algn="r" indent="0" marL="0">
@@ -5170,9 +4992,7 @@
           </a:ln>
         </p:spPr>
         <p:txBody>
-          <a:bodyPr wrap="square">
-            <a:normAutofit/>
-          </a:bodyPr>
+          <a:bodyPr/>
           <a:p/>
         </p:txBody>
       </p:sp>
@@ -5201,9 +5021,7 @@
           </a:ln>
         </p:spPr>
         <p:txBody>
-          <a:bodyPr wrap="square">
-            <a:normAutofit/>
-          </a:bodyPr>
+          <a:bodyPr/>
           <a:p/>
         </p:txBody>
       </p:sp>
@@ -5234,9 +5052,7 @@
           </a:ln>
         </p:spPr>
         <p:txBody>
-          <a:bodyPr wrap="square">
-            <a:normAutofit/>
-          </a:bodyPr>
+          <a:bodyPr/>
           <a:p/>
         </p:txBody>
       </p:sp>
@@ -5258,9 +5074,7 @@
           <a:ln/>
         </p:spPr>
         <p:txBody>
-          <a:bodyPr wrap="square" rtlCol="0" anchor="ctr">
-            <a:normAutofit/>
-          </a:bodyPr>
+          <a:bodyPr wrap="square" rtlCol="0" anchor="ctr"/>
           <a:lstStyle/>
           <a:p>
             <a:pPr algn="ctr" indent="0" marL="0">
@@ -5299,9 +5113,7 @@
           <a:ln/>
         </p:spPr>
         <p:txBody>
-          <a:bodyPr wrap="square" rtlCol="0" anchor="ctr">
-            <a:normAutofit/>
-          </a:bodyPr>
+          <a:bodyPr wrap="square" rtlCol="0" anchor="ctr"/>
           <a:lstStyle/>
           <a:p>
             <a:pPr indent="0" marL="0">
@@ -5340,9 +5152,7 @@
           <a:ln/>
         </p:spPr>
         <p:txBody>
-          <a:bodyPr wrap="square" rtlCol="0" anchor="ctr">
-            <a:normAutofit/>
-          </a:bodyPr>
+          <a:bodyPr wrap="square" rtlCol="0" anchor="ctr"/>
           <a:lstStyle/>
           <a:p>
             <a:pPr indent="0" marL="0">
@@ -5390,9 +5200,7 @@
           </a:ln>
         </p:spPr>
         <p:txBody>
-          <a:bodyPr wrap="square">
-            <a:normAutofit/>
-          </a:bodyPr>
+          <a:bodyPr/>
           <a:p/>
         </p:txBody>
       </p:sp>
@@ -5414,9 +5222,7 @@
           <a:ln/>
         </p:spPr>
         <p:txBody>
-          <a:bodyPr wrap="square" rtlCol="0" anchor="ctr">
-            <a:normAutofit/>
-          </a:bodyPr>
+          <a:bodyPr wrap="square" rtlCol="0" anchor="ctr"/>
           <a:lstStyle/>
           <a:p>
             <a:pPr indent="0" marL="0">
@@ -5455,9 +5261,7 @@
           <a:ln/>
         </p:spPr>
         <p:txBody>
-          <a:bodyPr wrap="square" rtlCol="0" anchor="t">
-            <a:normAutofit/>
-          </a:bodyPr>
+          <a:bodyPr wrap="square" rtlCol="0" anchor="t"/>
           <a:lstStyle/>
           <a:p>
             <a:pPr indent="0" marL="0">
@@ -5785,9 +5589,7 @@
           <a:ln/>
         </p:spPr>
         <p:txBody>
-          <a:bodyPr wrap="square" rtlCol="0" anchor="ctr">
-            <a:normAutofit/>
-          </a:bodyPr>
+          <a:bodyPr wrap="square" rtlCol="0" anchor="ctr"/>
           <a:lstStyle/>
           <a:p>
             <a:pPr algn="r" indent="0" marL="0">
@@ -5858,9 +5660,7 @@
           </a:ln>
         </p:spPr>
         <p:txBody>
-          <a:bodyPr wrap="square">
-            <a:normAutofit/>
-          </a:bodyPr>
+          <a:bodyPr/>
           <a:p/>
         </p:txBody>
       </p:sp>
@@ -5889,9 +5689,7 @@
           </a:ln>
         </p:spPr>
         <p:txBody>
-          <a:bodyPr wrap="square">
-            <a:normAutofit/>
-          </a:bodyPr>
+          <a:bodyPr/>
           <a:p/>
         </p:txBody>
       </p:sp>
@@ -5922,9 +5720,7 @@
           </a:ln>
         </p:spPr>
         <p:txBody>
-          <a:bodyPr wrap="square">
-            <a:normAutofit/>
-          </a:bodyPr>
+          <a:bodyPr/>
           <a:p/>
         </p:txBody>
       </p:sp>
@@ -5946,9 +5742,7 @@
           <a:ln/>
         </p:spPr>
         <p:txBody>
-          <a:bodyPr wrap="square" rtlCol="0" anchor="ctr">
-            <a:normAutofit/>
-          </a:bodyPr>
+          <a:bodyPr wrap="square" rtlCol="0" anchor="ctr"/>
           <a:lstStyle/>
           <a:p>
             <a:pPr algn="ctr" indent="0" marL="0">
@@ -5987,9 +5781,7 @@
           <a:ln/>
         </p:spPr>
         <p:txBody>
-          <a:bodyPr wrap="square" rtlCol="0" anchor="ctr">
-            <a:normAutofit/>
-          </a:bodyPr>
+          <a:bodyPr wrap="square" rtlCol="0" anchor="ctr"/>
           <a:lstStyle/>
           <a:p>
             <a:pPr indent="0" marL="0">
@@ -6028,9 +5820,7 @@
           <a:ln/>
         </p:spPr>
         <p:txBody>
-          <a:bodyPr wrap="square" rtlCol="0" anchor="ctr">
-            <a:normAutofit/>
-          </a:bodyPr>
+          <a:bodyPr wrap="square" rtlCol="0" anchor="ctr"/>
           <a:lstStyle/>
           <a:p>
             <a:pPr indent="0" marL="0">
@@ -6078,9 +5868,7 @@
           </a:ln>
         </p:spPr>
         <p:txBody>
-          <a:bodyPr wrap="square">
-            <a:normAutofit/>
-          </a:bodyPr>
+          <a:bodyPr/>
           <a:p/>
         </p:txBody>
       </p:sp>
@@ -6102,9 +5890,7 @@
           <a:ln/>
         </p:spPr>
         <p:txBody>
-          <a:bodyPr wrap="square" rtlCol="0" anchor="ctr">
-            <a:normAutofit/>
-          </a:bodyPr>
+          <a:bodyPr wrap="square" rtlCol="0" anchor="ctr"/>
           <a:lstStyle/>
           <a:p>
             <a:pPr indent="0" marL="0">
@@ -6143,9 +5929,7 @@
           <a:ln/>
         </p:spPr>
         <p:txBody>
-          <a:bodyPr wrap="square" rtlCol="0" anchor="ctr">
-            <a:normAutofit/>
-          </a:bodyPr>
+          <a:bodyPr wrap="square" rtlCol="0" anchor="ctr"/>
           <a:lstStyle/>
           <a:p>
             <a:pPr indent="0" marL="0">
@@ -6184,9 +5968,7 @@
           <a:ln/>
         </p:spPr>
         <p:txBody>
-          <a:bodyPr wrap="square" rtlCol="0" anchor="t">
-            <a:normAutofit/>
-          </a:bodyPr>
+          <a:bodyPr wrap="square" rtlCol="0" anchor="t"/>
           <a:lstStyle/>
           <a:p>
             <a:pPr indent="0" marL="0">
@@ -6225,9 +6007,7 @@
           <a:ln/>
         </p:spPr>
         <p:txBody>
-          <a:bodyPr wrap="square" rtlCol="0" anchor="ctr">
-            <a:normAutofit/>
-          </a:bodyPr>
+          <a:bodyPr wrap="square" rtlCol="0" anchor="ctr"/>
           <a:lstStyle/>
           <a:p>
             <a:pPr indent="0" marL="0">
@@ -6266,9 +6046,7 @@
           <a:ln/>
         </p:spPr>
         <p:txBody>
-          <a:bodyPr wrap="square" rtlCol="0" anchor="t">
-            <a:normAutofit/>
-          </a:bodyPr>
+          <a:bodyPr wrap="square" rtlCol="0" anchor="t"/>
           <a:lstStyle/>
           <a:p>
             <a:pPr indent="0" marL="0">
@@ -6307,9 +6085,7 @@
           <a:ln/>
         </p:spPr>
         <p:txBody>
-          <a:bodyPr wrap="square" rtlCol="0" anchor="ctr">
-            <a:normAutofit/>
-          </a:bodyPr>
+          <a:bodyPr wrap="square" rtlCol="0" anchor="ctr"/>
           <a:lstStyle/>
           <a:p>
             <a:pPr indent="0" marL="0">
@@ -6348,9 +6124,7 @@
           <a:ln/>
         </p:spPr>
         <p:txBody>
-          <a:bodyPr wrap="square" rtlCol="0" anchor="t">
-            <a:normAutofit/>
-          </a:bodyPr>
+          <a:bodyPr wrap="square" rtlCol="0" anchor="t"/>
           <a:lstStyle/>
           <a:p>
             <a:pPr indent="0" marL="0">
@@ -6398,9 +6172,7 @@
           </a:ln>
         </p:spPr>
         <p:txBody>
-          <a:bodyPr wrap="square">
-            <a:normAutofit/>
-          </a:bodyPr>
+          <a:bodyPr/>
           <a:p/>
         </p:txBody>
       </p:sp>
@@ -6422,9 +6194,7 @@
           <a:ln/>
         </p:spPr>
         <p:txBody>
-          <a:bodyPr wrap="square" rtlCol="0" anchor="ctr">
-            <a:normAutofit/>
-          </a:bodyPr>
+          <a:bodyPr wrap="square" rtlCol="0" anchor="ctr"/>
           <a:lstStyle/>
           <a:p>
             <a:pPr indent="0" marL="0">
@@ -6463,9 +6233,7 @@
           <a:ln/>
         </p:spPr>
         <p:txBody>
-          <a:bodyPr wrap="square" rtlCol="0" anchor="t">
-            <a:normAutofit/>
-          </a:bodyPr>
+          <a:bodyPr wrap="square" rtlCol="0" anchor="t"/>
           <a:lstStyle/>
           <a:p>
             <a:pPr indent="0" marL="0">
@@ -6504,9 +6272,7 @@
           <a:ln/>
         </p:spPr>
         <p:txBody>
-          <a:bodyPr wrap="square" rtlCol="0" anchor="t">
-            <a:normAutofit/>
-          </a:bodyPr>
+          <a:bodyPr wrap="square" rtlCol="0" anchor="t"/>
           <a:lstStyle/>
           <a:p>
             <a:pPr indent="0" marL="0">
@@ -6545,9 +6311,7 @@
           <a:ln/>
         </p:spPr>
         <p:txBody>
-          <a:bodyPr wrap="square" rtlCol="0" anchor="t">
-            <a:normAutofit/>
-          </a:bodyPr>
+          <a:bodyPr wrap="square" rtlCol="0" anchor="t"/>
           <a:lstStyle/>
           <a:p>
             <a:pPr indent="0" marL="0">
@@ -6586,9 +6350,7 @@
           <a:ln/>
         </p:spPr>
         <p:txBody>
-          <a:bodyPr wrap="square" rtlCol="0" anchor="ctr">
-            <a:normAutofit/>
-          </a:bodyPr>
+          <a:bodyPr wrap="square" rtlCol="0" anchor="ctr"/>
           <a:lstStyle/>
           <a:p>
             <a:pPr algn="r" indent="0" marL="0">
@@ -6659,9 +6421,7 @@
           </a:ln>
         </p:spPr>
         <p:txBody>
-          <a:bodyPr wrap="square">
-            <a:normAutofit/>
-          </a:bodyPr>
+          <a:bodyPr/>
           <a:p/>
         </p:txBody>
       </p:sp>
@@ -6690,9 +6450,7 @@
           </a:ln>
         </p:spPr>
         <p:txBody>
-          <a:bodyPr wrap="square">
-            <a:normAutofit/>
-          </a:bodyPr>
+          <a:bodyPr/>
           <a:p/>
         </p:txBody>
       </p:sp>
@@ -6723,9 +6481,7 @@
           </a:ln>
         </p:spPr>
         <p:txBody>
-          <a:bodyPr wrap="square">
-            <a:normAutofit/>
-          </a:bodyPr>
+          <a:bodyPr/>
           <a:p/>
         </p:txBody>
       </p:sp>
@@ -6747,9 +6503,7 @@
           <a:ln/>
         </p:spPr>
         <p:txBody>
-          <a:bodyPr wrap="square" rtlCol="0" anchor="ctr">
-            <a:normAutofit/>
-          </a:bodyPr>
+          <a:bodyPr wrap="square" rtlCol="0" anchor="ctr"/>
           <a:lstStyle/>
           <a:p>
             <a:pPr algn="ctr" indent="0" marL="0">
@@ -6788,9 +6542,7 @@
           <a:ln/>
         </p:spPr>
         <p:txBody>
-          <a:bodyPr wrap="square" rtlCol="0" anchor="ctr">
-            <a:normAutofit/>
-          </a:bodyPr>
+          <a:bodyPr wrap="square" rtlCol="0" anchor="ctr"/>
           <a:lstStyle/>
           <a:p>
             <a:pPr indent="0" marL="0">
@@ -6829,9 +6581,7 @@
           <a:ln/>
         </p:spPr>
         <p:txBody>
-          <a:bodyPr wrap="square" rtlCol="0" anchor="ctr">
-            <a:normAutofit/>
-          </a:bodyPr>
+          <a:bodyPr wrap="square" rtlCol="0" anchor="ctr"/>
           <a:lstStyle/>
           <a:p>
             <a:pPr indent="0" marL="0">
@@ -6879,9 +6629,7 @@
           </a:ln>
         </p:spPr>
         <p:txBody>
-          <a:bodyPr wrap="square">
-            <a:normAutofit/>
-          </a:bodyPr>
+          <a:bodyPr/>
           <a:p/>
         </p:txBody>
       </p:sp>
@@ -6903,9 +6651,7 @@
           <a:ln/>
         </p:spPr>
         <p:txBody>
-          <a:bodyPr wrap="square" rtlCol="0" anchor="ctr">
-            <a:normAutofit/>
-          </a:bodyPr>
+          <a:bodyPr wrap="square" rtlCol="0" anchor="ctr"/>
           <a:lstStyle/>
           <a:p>
             <a:pPr indent="0" marL="0">
@@ -6944,9 +6690,7 @@
           <a:ln/>
         </p:spPr>
         <p:txBody>
-          <a:bodyPr wrap="square" rtlCol="0" anchor="ctr">
-            <a:normAutofit/>
-          </a:bodyPr>
+          <a:bodyPr wrap="square" rtlCol="0" anchor="ctr"/>
           <a:lstStyle/>
           <a:p>
             <a:pPr indent="0" marL="0">
@@ -6985,9 +6729,7 @@
           <a:ln/>
         </p:spPr>
         <p:txBody>
-          <a:bodyPr wrap="square" rtlCol="0" anchor="t">
-            <a:normAutofit/>
-          </a:bodyPr>
+          <a:bodyPr wrap="square" rtlCol="0" anchor="t"/>
           <a:lstStyle/>
           <a:p>
             <a:pPr indent="0" marL="0">
@@ -7026,9 +6768,7 @@
           <a:ln/>
         </p:spPr>
         <p:txBody>
-          <a:bodyPr wrap="square" rtlCol="0" anchor="ctr">
-            <a:normAutofit/>
-          </a:bodyPr>
+          <a:bodyPr wrap="square" rtlCol="0" anchor="ctr"/>
           <a:lstStyle/>
           <a:p>
             <a:pPr indent="0" marL="0">
@@ -7067,9 +6807,7 @@
           <a:ln/>
         </p:spPr>
         <p:txBody>
-          <a:bodyPr wrap="square" rtlCol="0" anchor="t">
-            <a:normAutofit/>
-          </a:bodyPr>
+          <a:bodyPr wrap="square" rtlCol="0" anchor="t"/>
           <a:lstStyle/>
           <a:p>
             <a:pPr indent="0" marL="0">
@@ -7108,9 +6846,7 @@
           <a:ln/>
         </p:spPr>
         <p:txBody>
-          <a:bodyPr wrap="square" rtlCol="0" anchor="ctr">
-            <a:normAutofit/>
-          </a:bodyPr>
+          <a:bodyPr wrap="square" rtlCol="0" anchor="ctr"/>
           <a:lstStyle/>
           <a:p>
             <a:pPr indent="0" marL="0">
@@ -7149,9 +6885,7 @@
           <a:ln/>
         </p:spPr>
         <p:txBody>
-          <a:bodyPr wrap="square" rtlCol="0" anchor="t">
-            <a:normAutofit/>
-          </a:bodyPr>
+          <a:bodyPr wrap="square" rtlCol="0" anchor="t"/>
           <a:lstStyle/>
           <a:p>
             <a:pPr indent="0" marL="0">
@@ -7199,9 +6933,7 @@
           </a:ln>
         </p:spPr>
         <p:txBody>
-          <a:bodyPr wrap="square">
-            <a:normAutofit/>
-          </a:bodyPr>
+          <a:bodyPr/>
           <a:p/>
         </p:txBody>
       </p:sp>
@@ -7223,9 +6955,7 @@
           <a:ln/>
         </p:spPr>
         <p:txBody>
-          <a:bodyPr wrap="square" rtlCol="0" anchor="ctr">
-            <a:normAutofit/>
-          </a:bodyPr>
+          <a:bodyPr wrap="square" rtlCol="0" anchor="ctr"/>
           <a:lstStyle/>
           <a:p>
             <a:pPr indent="0" marL="0">
@@ -7264,9 +6994,7 @@
           <a:ln/>
         </p:spPr>
         <p:txBody>
-          <a:bodyPr wrap="square" rtlCol="0" anchor="t">
-            <a:normAutofit/>
-          </a:bodyPr>
+          <a:bodyPr wrap="square" rtlCol="0" anchor="t"/>
           <a:lstStyle/>
           <a:p>
             <a:pPr indent="0" marL="0">
@@ -7305,9 +7033,7 @@
           <a:ln/>
         </p:spPr>
         <p:txBody>
-          <a:bodyPr wrap="square" rtlCol="0" anchor="t">
-            <a:normAutofit/>
-          </a:bodyPr>
+          <a:bodyPr wrap="square" rtlCol="0" anchor="t"/>
           <a:lstStyle/>
           <a:p>
             <a:pPr indent="0" marL="0">
@@ -7346,9 +7072,7 @@
           <a:ln/>
         </p:spPr>
         <p:txBody>
-          <a:bodyPr wrap="square" rtlCol="0" anchor="t">
-            <a:normAutofit/>
-          </a:bodyPr>
+          <a:bodyPr wrap="square" rtlCol="0" anchor="t"/>
           <a:lstStyle/>
           <a:p>
             <a:pPr indent="0" marL="0">
@@ -7387,9 +7111,7 @@
           <a:ln/>
         </p:spPr>
         <p:txBody>
-          <a:bodyPr wrap="square" rtlCol="0" anchor="ctr">
-            <a:normAutofit/>
-          </a:bodyPr>
+          <a:bodyPr wrap="square" rtlCol="0" anchor="ctr"/>
           <a:lstStyle/>
           <a:p>
             <a:pPr algn="r" indent="0" marL="0">
